--- a/lecons/F1/11_F1_M2_GW01_Degradation_of_the_Natural_Environment_of_the_School.pptx
+++ b/lecons/F1/11_F1_M2_GW01_Degradation_of_the_Natural_Environment_of_the_School.pptx
@@ -57,9 +57,13 @@
     <p:sldId id="305" r:id="rId51"/>
     <p:sldId id="306" r:id="rId52"/>
     <p:sldId id="307" r:id="rId53"/>
+    <p:sldId id="308" r:id="rId54"/>
+    <p:sldId id="309" r:id="rId55"/>
+    <p:sldId id="310" r:id="rId56"/>
+    <p:sldId id="311" r:id="rId57"/>
   </p:sldIdLst>
   <p:notesMasterIdLst>
-    <p:notesMasterId r:id="rId54"/>
+    <p:notesMasterId r:id="rId58"/>
   </p:notesMasterIdLst>
   <p:sldSz cx="12192000" cy="6858000"/>
   <p:notesSz cx="6858000" cy="12192000"/>
@@ -641,7 +645,7 @@
           <a:p>
             <a:r>
               <a:rPr lang="en-US" dirty="0"/>
-              <a:t>Listen carefully to this situation from real life. The principal of DGCAST wants a cleaner and greener school. He asks Form 1 to walk around the school, find the places that are damaged and propose what to do. Think about it, because I am going to ask you some questions.</a:t>
+              <a:t>Listen carefully to this situation from real life. The principal of DGCAST notices rubbish, bare soil and cut trees around the school. He asks Form 1: "Which places of our school are damaged, what caused the damage, and what can we do to repair it?" Think about it, because I am going to ask you some questions.</a:t>
             </a:r>
             <a:endParaRPr lang="en-US" dirty="0"/>
           </a:p>
@@ -817,7 +821,7 @@
           <a:p>
             <a:r>
               <a:rPr lang="en-US" dirty="0"/>
-              <a:t>Good. The school environment is damaged and needs solutions.</a:t>
+              <a:t>Good. The school environment is damaged, and the class must find the causes and the solutions.</a:t>
             </a:r>
             <a:endParaRPr lang="en-US" dirty="0"/>
           </a:p>
@@ -1609,7 +1613,7 @@
           <a:p>
             <a:r>
               <a:rPr lang="en-US" dirty="0"/>
-              <a:t>Here is the question for Activity 1: Recall four types of human aggression on the environment. Take one minute to think and write your answer in your rough notebook.</a:t>
+              <a:t>Here is the question for Activity 1: What is the damage shown in this picture? Take one minute to think and write your answer in your rough notebook.</a:t>
             </a:r>
             <a:endParaRPr lang="en-US" dirty="0"/>
           </a:p>
@@ -1697,7 +1701,7 @@
           <a:p>
             <a:r>
               <a:rPr lang="en-US" dirty="0"/>
-              <a:t>Let us check the answer together. Cutting trees, bush fires, dumping rubbish and digging or trampling the soil (also poaching).</a:t>
+              <a:t>Let us check the answer together. Trees have been cut and burnt: it is deforestation.</a:t>
             </a:r>
             <a:endParaRPr lang="en-US" dirty="0"/>
           </a:p>
@@ -1873,7 +1877,7 @@
           <a:p>
             <a:r>
               <a:rPr lang="en-US" dirty="0"/>
-              <a:t>Here is the question for Activity 2: What should you write in your notebook for each damaged place you observe? Take one minute to think and write your answer in your rough notebook.</a:t>
+              <a:t>Here is the question for Activity 2: What should you write in your notebook for each damaged place? Take one minute to think and write your answer in your rough notebook.</a:t>
             </a:r>
             <a:endParaRPr lang="en-US" dirty="0"/>
           </a:p>
@@ -2401,7 +2405,7 @@
           <a:p>
             <a:r>
               <a:rPr lang="en-US" dirty="0"/>
-              <a:t>Here is the question for Activity 4: Explain why these damages happen around the school. Take one minute to think and write your answer in your rough notebook.</a:t>
+              <a:t>Here is the question for Activity 4: Why is the grass burnt around some schools? Take one minute to think and write your answer in your rough notebook.</a:t>
             </a:r>
             <a:endParaRPr lang="en-US" dirty="0"/>
           </a:p>
@@ -2577,7 +2581,7 @@
           <a:p>
             <a:r>
               <a:rPr lang="en-US" dirty="0"/>
-              <a:t>Let us check the answer together. People throw rubbish, cut trees, walk on the grass and burn grass or waste.</a:t>
+              <a:t>Let us check the answer together. People burn rubbish or grass to clear the place.</a:t>
             </a:r>
             <a:endParaRPr lang="en-US" dirty="0"/>
           </a:p>
@@ -2753,7 +2757,7 @@
           <a:p>
             <a:r>
               <a:rPr lang="en-US" dirty="0"/>
-              <a:t>Here is the question for Activity 5: Give three solutions for the school. Take one minute to think and write your answer in your rough notebook.</a:t>
+              <a:t>Here is the question for Activity 5: What can our class do to protect the school environment? Take one minute to think and write your answer in your rough notebook.</a:t>
             </a:r>
             <a:endParaRPr lang="en-US" dirty="0"/>
           </a:p>
@@ -2841,7 +2845,7 @@
           <a:p>
             <a:r>
               <a:rPr lang="en-US" dirty="0"/>
-              <a:t>Let us check the answer together. Plant trees and grass, put dustbins and sort waste, and make paths to protect the soil.</a:t>
+              <a:t>Let us check the answer together. Plant trees and grass, use dustbins and walk on the paths.</a:t>
             </a:r>
             <a:endParaRPr lang="en-US" dirty="0"/>
           </a:p>
@@ -3017,7 +3021,7 @@
           <a:p>
             <a:r>
               <a:rPr lang="en-US" dirty="0"/>
-              <a:t>Let us copy Theoretical Basis. People damage the natural environment in the following ways. On this slide we have Deforestation and Pollution. Write each point on a new line, with the key term first, and explain it in your own words when we revise. When you finish, we go to the next slide.</a:t>
+              <a:t>Let us copy the definitions. The key terms of this lesson are defined as follows. On this slide we have Human aggression. Write each point on a new line, with the key term first, and explain it in your own words when we revise.</a:t>
             </a:r>
             <a:endParaRPr lang="en-US" dirty="0"/>
           </a:p>
@@ -3105,7 +3109,7 @@
           <a:p>
             <a:r>
               <a:rPr lang="en-US" dirty="0"/>
-              <a:t>We continue with Theoretical Basis. On this slide we have Soil degradation. Write each point on a new line, with the key term first, and explain it in your own words when we revise.</a:t>
+              <a:t>Let us copy Types of Human Aggression on the Environment. People damage the natural environment in the following ways. Copy the point on Deforestation on the left, then draw the diagram on the right: cut trees. Give it a title and label it clearly.</a:t>
             </a:r>
             <a:endParaRPr lang="en-US" dirty="0"/>
           </a:p>
@@ -3193,7 +3197,7 @@
           <a:p>
             <a:r>
               <a:rPr lang="en-US" dirty="0"/>
-              <a:t>Let us copy Method of the Field Visit. The field visit is carried out in the following steps. On this slide we have Step 1 and Step 2. Write each point on a new line, with the key term first, and explain it in your own words when we revise. When you finish, we go to the next slide.</a:t>
+              <a:t>Copy the point on Bush fires on the left, then draw the diagram on the right: burnt grass. Give it a title and label it clearly.</a:t>
             </a:r>
             <a:endParaRPr lang="en-US" dirty="0"/>
           </a:p>
@@ -3281,7 +3285,7 @@
           <a:p>
             <a:r>
               <a:rPr lang="en-US" dirty="0"/>
-              <a:t>We continue with Method of the Field Visit. On this slide we have Step 3 and Step 4. Write each point on a new line, with the key term first, and explain it in your own words when we revise.</a:t>
+              <a:t>Copy the point on Pollution on the left, then draw the diagram on the right: rubbish. Give it a title and label it clearly.</a:t>
             </a:r>
             <a:endParaRPr lang="en-US" dirty="0"/>
           </a:p>
@@ -3369,7 +3373,7 @@
           <a:p>
             <a:r>
               <a:rPr lang="en-US" dirty="0"/>
-              <a:t>Let us copy Solutions for the School. The school environment can be protected by the following actions. On this slide we have Planting and Waste management. Write each point on a new line, with the key term first, and explain it in your own words when we revise. When you finish, we go to the next slide.</a:t>
+              <a:t>Copy the point on Soil degradation on the left, then draw the diagram on the right: a gully. Give it a title and label it clearly.</a:t>
             </a:r>
             <a:endParaRPr lang="en-US" dirty="0"/>
           </a:p>
@@ -3545,7 +3549,7 @@
           <a:p>
             <a:r>
               <a:rPr lang="en-US" dirty="0"/>
-              <a:t>We continue with Solutions for the School. On this slide we have Good behaviour. Write each point on a new line, with the key term first, and explain it in your own words when we revise.</a:t>
+              <a:t>Let us copy Method of the Field Visit. The field visit is carried out in the following steps. On this slide we have Step 1 and Step 2. Write each point on a new line, with the key term first, and explain it in your own words when we revise. When you finish, we go to the next slide.</a:t>
             </a:r>
             <a:endParaRPr lang="en-US" dirty="0"/>
           </a:p>
@@ -3633,7 +3637,7 @@
           <a:p>
             <a:r>
               <a:rPr lang="en-US" dirty="0"/>
-              <a:t>Now let us check what you have understood. Question 1: Name two forms of degradation observed around the school. Answer in your exercise book.</a:t>
+              <a:t>We continue with Method of the Field Visit. On this slide we have Step 3 and Step 4. Write each point on a new line, with the key term first, and explain it in your own words when we revise.</a:t>
             </a:r>
             <a:endParaRPr lang="en-US" dirty="0"/>
           </a:p>
@@ -3721,7 +3725,7 @@
           <a:p>
             <a:r>
               <a:rPr lang="en-US" dirty="0"/>
-              <a:t>The expected answer is: rubbish on the ground and bare, eroded soil (also cut trees). If you got it right, well done.</a:t>
+              <a:t>Let us copy Solutions for the School. The school environment can be protected by the following actions. Copy the point on Planting on the left, then draw the diagram on the right: planting a tree. Give it a title and label it clearly.</a:t>
             </a:r>
             <a:endParaRPr lang="en-US" dirty="0"/>
           </a:p>
@@ -3809,7 +3813,7 @@
           <a:p>
             <a:r>
               <a:rPr lang="en-US" dirty="0"/>
-              <a:t>Now let us check what you have understood. Question 2: Propose two solutions. Answer in your exercise book.</a:t>
+              <a:t>Copy the point on Waste management on the left, then draw the diagram on the right: sorting waste. Give it a title and label it clearly.</a:t>
             </a:r>
             <a:endParaRPr lang="en-US" dirty="0"/>
           </a:p>
@@ -3897,7 +3901,7 @@
           <a:p>
             <a:r>
               <a:rPr lang="en-US" dirty="0"/>
-              <a:t>The expected answer is: plant trees and put dustbins. If you got it right, well done.</a:t>
+              <a:t>We continue with Solutions for the School. On this slide we have Protecting the soil and Good behaviour. Write each point on a new line, with the key term first, and explain it in your own words when we revise.</a:t>
             </a:r>
             <a:endParaRPr lang="en-US" dirty="0"/>
           </a:p>
@@ -3985,7 +3989,7 @@
           <a:p>
             <a:r>
               <a:rPr lang="en-US" dirty="0"/>
-              <a:t>For those who need more practice, fill in the blanks in your exercise book. The answers are: number 1, deforestation; number 2, pollution; number 3, soil.</a:t>
+              <a:t>Now let us check what you have understood. Question 1: Name two forms of degradation observed around the school. Answer in your exercise book.</a:t>
             </a:r>
             <a:endParaRPr lang="en-US" dirty="0"/>
           </a:p>
@@ -4073,7 +4077,7 @@
           <a:p>
             <a:r>
               <a:rPr lang="en-US" dirty="0"/>
-              <a:t>For your homework: Write a short report (five lines) on the damage you observed around the school and your solutions. We shall correct it at the beginning of our next lesson.</a:t>
+              <a:t>The expected answer is: rubbish on the ground and bare, eroded soil (also cut trees). If you got it right, well done.</a:t>
             </a:r>
             <a:endParaRPr lang="en-US" dirty="0"/>
           </a:p>
@@ -4161,7 +4165,7 @@
           <a:p>
             <a:r>
               <a:rPr lang="en-US" dirty="0"/>
-              <a:t>Our next lesson will be on Practical Work 5: Solid Waste Management. Thank you for your attention, and see you next time.</a:t>
+              <a:t>Now let us check what you have understood. Question 2: Propose two solutions. Answer in your exercise book.</a:t>
             </a:r>
             <a:endParaRPr lang="en-US" dirty="0"/>
           </a:p>
@@ -4249,7 +4253,7 @@
           <a:p>
             <a:r>
               <a:rPr lang="en-US" dirty="0"/>
-              <a:t>Let us play the bilingual game. I say a word in English, and you give me the French word. Then we do the reverse.</a:t>
+              <a:t>The expected answer is: plant trees and put dustbins. If you got it right, well done.</a:t>
             </a:r>
             <a:endParaRPr lang="en-US" dirty="0"/>
           </a:p>
@@ -4337,7 +4341,7 @@
           <a:p>
             <a:r>
               <a:rPr lang="en-US" dirty="0"/>
-              <a:t>I record this information in the official logbook of the class after the lesson.</a:t>
+              <a:t>For those who need more practice, fill in the blanks in your exercise book. The answers are: number 1, deforestation; number 2, pollution; number 3, soil.</a:t>
             </a:r>
             <a:endParaRPr lang="en-US" dirty="0"/>
           </a:p>
@@ -4513,7 +4517,7 @@
           <a:p>
             <a:r>
               <a:rPr lang="en-US" dirty="0"/>
-              <a:t>I complete the second page of the logbook: the matter taught, the evaluation, the homework and the attendance.</a:t>
+              <a:t>For your homework: Write a short report (five lines) on the damage you observed around the school and your solutions. We shall correct it at the beginning of our next lesson.</a:t>
             </a:r>
             <a:endParaRPr lang="en-US" dirty="0"/>
           </a:p>
@@ -4601,7 +4605,7 @@
           <a:p>
             <a:r>
               <a:rPr lang="en-US" dirty="0"/>
-              <a:t>This slide is for me, the teacher: it gives the timing of the lesson and what to do if the projector is not available.</a:t>
+              <a:t>Our next lesson will be on Practical Work 5: Solid Waste Management. Thank you for your attention, and see you next time.</a:t>
             </a:r>
             <a:endParaRPr lang="en-US" dirty="0"/>
           </a:p>
@@ -4689,7 +4693,7 @@
           <a:p>
             <a:r>
               <a:rPr lang="en-US" dirty="0"/>
-              <a:t>These are the references and picture credits used to prepare this lesson.</a:t>
+              <a:t>Let us play the bilingual game. I say a word in English, and you give me the French word. Then we do the reverse.</a:t>
             </a:r>
             <a:endParaRPr lang="en-US" dirty="0"/>
           </a:p>
@@ -4713,6 +4717,358 @@
             <a:fld id="{F7021451-1387-4CA6-816F-3879F97B5CBC}" type="slidenum">
               <a:rPr lang="en-US"/>
               <a:t>52</a:t>
+            </a:fld>
+            <a:endParaRPr lang="en-US"/>
+          </a:p>
+        </p:txBody>
+      </p:sp>
+    </p:spTree>
+    <p:extLst>
+      <p:ext uri="{BB962C8B-B14F-4D97-AF65-F5344CB8AC3E}">
+        <p14:creationId xmlns:p14="http://schemas.microsoft.com/office/powerpoint/2010/main" val="1024086991"/>
+      </p:ext>
+    </p:extLst>
+  </p:cSld>
+  <p:clrMapOvr>
+    <a:masterClrMapping/>
+  </p:clrMapOvr>
+</p:notes>
+</file>
+
+<file path=ppt/notesSlides/notesSlide53.xml><?xml version="1.0" encoding="utf-8"?>
+<p:notes xmlns:a="http://schemas.openxmlformats.org/drawingml/2006/main" xmlns:r="http://schemas.openxmlformats.org/officeDocument/2006/relationships" xmlns:p="http://schemas.openxmlformats.org/presentationml/2006/main">
+  <p:cSld>
+    <p:spTree>
+      <p:nvGrpSpPr>
+        <p:cNvPr id="1" name=""/>
+        <p:cNvGrpSpPr/>
+        <p:nvPr/>
+      </p:nvGrpSpPr>
+      <p:grpSpPr>
+        <a:xfrm>
+          <a:off x="0" y="0"/>
+          <a:ext cx="0" cy="0"/>
+          <a:chOff x="0" y="0"/>
+          <a:chExt cx="0" cy="0"/>
+        </a:xfrm>
+      </p:grpSpPr>
+      <p:sp>
+        <p:nvSpPr>
+          <p:cNvPr id="2" name="Slide Image Placeholder 1"/>
+          <p:cNvSpPr>
+            <a:spLocks noGrp="1" noRot="1" noChangeAspect="1"/>
+          </p:cNvSpPr>
+          <p:nvPr>
+            <p:ph type="sldImg"/>
+          </p:nvPr>
+        </p:nvSpPr>
+        <p:spPr/>
+      </p:sp>
+      <p:sp>
+        <p:nvSpPr>
+          <p:cNvPr id="3" name="Notes Placeholder 2"/>
+          <p:cNvSpPr>
+            <a:spLocks noGrp="1"/>
+          </p:cNvSpPr>
+          <p:nvPr>
+            <p:ph type="body" idx="1"/>
+          </p:nvPr>
+        </p:nvSpPr>
+        <p:spPr/>
+        <p:txBody>
+          <a:bodyPr/>
+          <a:lstStyle/>
+          <a:p>
+            <a:r>
+              <a:rPr lang="en-US" dirty="0"/>
+              <a:t>I record this information in the official logbook of the class after the lesson.</a:t>
+            </a:r>
+            <a:endParaRPr lang="en-US" dirty="0"/>
+          </a:p>
+        </p:txBody>
+      </p:sp>
+      <p:sp>
+        <p:nvSpPr>
+          <p:cNvPr id="4" name="Slide Number Placeholder 3"/>
+          <p:cNvSpPr>
+            <a:spLocks noGrp="1"/>
+          </p:cNvSpPr>
+          <p:nvPr>
+            <p:ph type="sldNum" sz="quarter" idx="10"/>
+          </p:nvPr>
+        </p:nvSpPr>
+        <p:spPr/>
+        <p:txBody>
+          <a:bodyPr/>
+          <a:lstStyle/>
+          <a:p>
+            <a:fld id="{F7021451-1387-4CA6-816F-3879F97B5CBC}" type="slidenum">
+              <a:rPr lang="en-US"/>
+              <a:t>53</a:t>
+            </a:fld>
+            <a:endParaRPr lang="en-US"/>
+          </a:p>
+        </p:txBody>
+      </p:sp>
+    </p:spTree>
+    <p:extLst>
+      <p:ext uri="{BB962C8B-B14F-4D97-AF65-F5344CB8AC3E}">
+        <p14:creationId xmlns:p14="http://schemas.microsoft.com/office/powerpoint/2010/main" val="1024086991"/>
+      </p:ext>
+    </p:extLst>
+  </p:cSld>
+  <p:clrMapOvr>
+    <a:masterClrMapping/>
+  </p:clrMapOvr>
+</p:notes>
+</file>
+
+<file path=ppt/notesSlides/notesSlide54.xml><?xml version="1.0" encoding="utf-8"?>
+<p:notes xmlns:a="http://schemas.openxmlformats.org/drawingml/2006/main" xmlns:r="http://schemas.openxmlformats.org/officeDocument/2006/relationships" xmlns:p="http://schemas.openxmlformats.org/presentationml/2006/main">
+  <p:cSld>
+    <p:spTree>
+      <p:nvGrpSpPr>
+        <p:cNvPr id="1" name=""/>
+        <p:cNvGrpSpPr/>
+        <p:nvPr/>
+      </p:nvGrpSpPr>
+      <p:grpSpPr>
+        <a:xfrm>
+          <a:off x="0" y="0"/>
+          <a:ext cx="0" cy="0"/>
+          <a:chOff x="0" y="0"/>
+          <a:chExt cx="0" cy="0"/>
+        </a:xfrm>
+      </p:grpSpPr>
+      <p:sp>
+        <p:nvSpPr>
+          <p:cNvPr id="2" name="Slide Image Placeholder 1"/>
+          <p:cNvSpPr>
+            <a:spLocks noGrp="1" noRot="1" noChangeAspect="1"/>
+          </p:cNvSpPr>
+          <p:nvPr>
+            <p:ph type="sldImg"/>
+          </p:nvPr>
+        </p:nvSpPr>
+        <p:spPr/>
+      </p:sp>
+      <p:sp>
+        <p:nvSpPr>
+          <p:cNvPr id="3" name="Notes Placeholder 2"/>
+          <p:cNvSpPr>
+            <a:spLocks noGrp="1"/>
+          </p:cNvSpPr>
+          <p:nvPr>
+            <p:ph type="body" idx="1"/>
+          </p:nvPr>
+        </p:nvSpPr>
+        <p:spPr/>
+        <p:txBody>
+          <a:bodyPr/>
+          <a:lstStyle/>
+          <a:p>
+            <a:r>
+              <a:rPr lang="en-US" dirty="0"/>
+              <a:t>I complete the second page of the logbook: the matter taught, the evaluation, the homework and the attendance.</a:t>
+            </a:r>
+            <a:endParaRPr lang="en-US" dirty="0"/>
+          </a:p>
+        </p:txBody>
+      </p:sp>
+      <p:sp>
+        <p:nvSpPr>
+          <p:cNvPr id="4" name="Slide Number Placeholder 3"/>
+          <p:cNvSpPr>
+            <a:spLocks noGrp="1"/>
+          </p:cNvSpPr>
+          <p:nvPr>
+            <p:ph type="sldNum" sz="quarter" idx="10"/>
+          </p:nvPr>
+        </p:nvSpPr>
+        <p:spPr/>
+        <p:txBody>
+          <a:bodyPr/>
+          <a:lstStyle/>
+          <a:p>
+            <a:fld id="{F7021451-1387-4CA6-816F-3879F97B5CBC}" type="slidenum">
+              <a:rPr lang="en-US"/>
+              <a:t>54</a:t>
+            </a:fld>
+            <a:endParaRPr lang="en-US"/>
+          </a:p>
+        </p:txBody>
+      </p:sp>
+    </p:spTree>
+    <p:extLst>
+      <p:ext uri="{BB962C8B-B14F-4D97-AF65-F5344CB8AC3E}">
+        <p14:creationId xmlns:p14="http://schemas.microsoft.com/office/powerpoint/2010/main" val="1024086991"/>
+      </p:ext>
+    </p:extLst>
+  </p:cSld>
+  <p:clrMapOvr>
+    <a:masterClrMapping/>
+  </p:clrMapOvr>
+</p:notes>
+</file>
+
+<file path=ppt/notesSlides/notesSlide55.xml><?xml version="1.0" encoding="utf-8"?>
+<p:notes xmlns:a="http://schemas.openxmlformats.org/drawingml/2006/main" xmlns:r="http://schemas.openxmlformats.org/officeDocument/2006/relationships" xmlns:p="http://schemas.openxmlformats.org/presentationml/2006/main">
+  <p:cSld>
+    <p:spTree>
+      <p:nvGrpSpPr>
+        <p:cNvPr id="1" name=""/>
+        <p:cNvGrpSpPr/>
+        <p:nvPr/>
+      </p:nvGrpSpPr>
+      <p:grpSpPr>
+        <a:xfrm>
+          <a:off x="0" y="0"/>
+          <a:ext cx="0" cy="0"/>
+          <a:chOff x="0" y="0"/>
+          <a:chExt cx="0" cy="0"/>
+        </a:xfrm>
+      </p:grpSpPr>
+      <p:sp>
+        <p:nvSpPr>
+          <p:cNvPr id="2" name="Slide Image Placeholder 1"/>
+          <p:cNvSpPr>
+            <a:spLocks noGrp="1" noRot="1" noChangeAspect="1"/>
+          </p:cNvSpPr>
+          <p:nvPr>
+            <p:ph type="sldImg"/>
+          </p:nvPr>
+        </p:nvSpPr>
+        <p:spPr/>
+      </p:sp>
+      <p:sp>
+        <p:nvSpPr>
+          <p:cNvPr id="3" name="Notes Placeholder 2"/>
+          <p:cNvSpPr>
+            <a:spLocks noGrp="1"/>
+          </p:cNvSpPr>
+          <p:nvPr>
+            <p:ph type="body" idx="1"/>
+          </p:nvPr>
+        </p:nvSpPr>
+        <p:spPr/>
+        <p:txBody>
+          <a:bodyPr/>
+          <a:lstStyle/>
+          <a:p>
+            <a:r>
+              <a:rPr lang="en-US" dirty="0"/>
+              <a:t>This slide is for me, the teacher: it gives the timing of the lesson and what to do if the projector is not available.</a:t>
+            </a:r>
+            <a:endParaRPr lang="en-US" dirty="0"/>
+          </a:p>
+        </p:txBody>
+      </p:sp>
+      <p:sp>
+        <p:nvSpPr>
+          <p:cNvPr id="4" name="Slide Number Placeholder 3"/>
+          <p:cNvSpPr>
+            <a:spLocks noGrp="1"/>
+          </p:cNvSpPr>
+          <p:nvPr>
+            <p:ph type="sldNum" sz="quarter" idx="10"/>
+          </p:nvPr>
+        </p:nvSpPr>
+        <p:spPr/>
+        <p:txBody>
+          <a:bodyPr/>
+          <a:lstStyle/>
+          <a:p>
+            <a:fld id="{F7021451-1387-4CA6-816F-3879F97B5CBC}" type="slidenum">
+              <a:rPr lang="en-US"/>
+              <a:t>55</a:t>
+            </a:fld>
+            <a:endParaRPr lang="en-US"/>
+          </a:p>
+        </p:txBody>
+      </p:sp>
+    </p:spTree>
+    <p:extLst>
+      <p:ext uri="{BB962C8B-B14F-4D97-AF65-F5344CB8AC3E}">
+        <p14:creationId xmlns:p14="http://schemas.microsoft.com/office/powerpoint/2010/main" val="1024086991"/>
+      </p:ext>
+    </p:extLst>
+  </p:cSld>
+  <p:clrMapOvr>
+    <a:masterClrMapping/>
+  </p:clrMapOvr>
+</p:notes>
+</file>
+
+<file path=ppt/notesSlides/notesSlide56.xml><?xml version="1.0" encoding="utf-8"?>
+<p:notes xmlns:a="http://schemas.openxmlformats.org/drawingml/2006/main" xmlns:r="http://schemas.openxmlformats.org/officeDocument/2006/relationships" xmlns:p="http://schemas.openxmlformats.org/presentationml/2006/main">
+  <p:cSld>
+    <p:spTree>
+      <p:nvGrpSpPr>
+        <p:cNvPr id="1" name=""/>
+        <p:cNvGrpSpPr/>
+        <p:nvPr/>
+      </p:nvGrpSpPr>
+      <p:grpSpPr>
+        <a:xfrm>
+          <a:off x="0" y="0"/>
+          <a:ext cx="0" cy="0"/>
+          <a:chOff x="0" y="0"/>
+          <a:chExt cx="0" cy="0"/>
+        </a:xfrm>
+      </p:grpSpPr>
+      <p:sp>
+        <p:nvSpPr>
+          <p:cNvPr id="2" name="Slide Image Placeholder 1"/>
+          <p:cNvSpPr>
+            <a:spLocks noGrp="1" noRot="1" noChangeAspect="1"/>
+          </p:cNvSpPr>
+          <p:nvPr>
+            <p:ph type="sldImg"/>
+          </p:nvPr>
+        </p:nvSpPr>
+        <p:spPr/>
+      </p:sp>
+      <p:sp>
+        <p:nvSpPr>
+          <p:cNvPr id="3" name="Notes Placeholder 2"/>
+          <p:cNvSpPr>
+            <a:spLocks noGrp="1"/>
+          </p:cNvSpPr>
+          <p:nvPr>
+            <p:ph type="body" idx="1"/>
+          </p:nvPr>
+        </p:nvSpPr>
+        <p:spPr/>
+        <p:txBody>
+          <a:bodyPr/>
+          <a:lstStyle/>
+          <a:p>
+            <a:r>
+              <a:rPr lang="en-US" dirty="0"/>
+              <a:t>These are the references and picture credits used to prepare this lesson.</a:t>
+            </a:r>
+            <a:endParaRPr lang="en-US" dirty="0"/>
+          </a:p>
+        </p:txBody>
+      </p:sp>
+      <p:sp>
+        <p:nvSpPr>
+          <p:cNvPr id="4" name="Slide Number Placeholder 3"/>
+          <p:cNvSpPr>
+            <a:spLocks noGrp="1"/>
+          </p:cNvSpPr>
+          <p:nvPr>
+            <p:ph type="sldNum" sz="quarter" idx="10"/>
+          </p:nvPr>
+        </p:nvSpPr>
+        <p:spPr/>
+        <p:txBody>
+          <a:bodyPr/>
+          <a:lstStyle/>
+          <a:p>
+            <a:fld id="{F7021451-1387-4CA6-816F-3879F97B5CBC}" type="slidenum">
+              <a:rPr lang="en-US"/>
+              <a:t>56</a:t>
             </a:fld>
             <a:endParaRPr lang="en-US"/>
           </a:p>
@@ -6421,7 +6777,7 @@
         <p:spPr>
           <a:xfrm>
             <a:off x="0" y="658368"/>
-            <a:ext cx="5120640" cy="5833872"/>
+            <a:ext cx="3840480" cy="5833872"/>
           </a:xfrm>
           <a:prstGeom prst="rect">
             <a:avLst/>
@@ -6436,8 +6792,8 @@
         </p:nvSpPr>
         <p:spPr>
           <a:xfrm>
-            <a:off x="5349240" y="1005840"/>
-            <a:ext cx="6522415" cy="731520"/>
+            <a:off x="4069080" y="1005840"/>
+            <a:ext cx="7802575" cy="731520"/>
           </a:xfrm>
           <a:prstGeom prst="rect">
             <a:avLst/>
@@ -6477,8 +6833,8 @@
         </p:nvSpPr>
         <p:spPr>
           <a:xfrm>
-            <a:off x="5349240" y="1783080"/>
-            <a:ext cx="6522415" cy="4663440"/>
+            <a:off x="4069080" y="1783080"/>
+            <a:ext cx="7802575" cy="4663440"/>
           </a:xfrm>
           <a:prstGeom prst="rect">
             <a:avLst/>
@@ -6505,7 +6861,7 @@
                 <a:ea typeface="Times New Roman" pitchFamily="34" charset="-122"/>
                 <a:cs typeface="Times New Roman" pitchFamily="34" charset="-120"/>
               </a:rPr>
-              <a:t>The principal of DGCAST wants a cleaner and greener school. He asks Form 1 to walk around the school, find the places that are damaged and propose what to do.</a:t>
+              <a:t>The principal of DGCAST notices rubbish, bare soil and cut trees around the school. He asks Form 1: "Which places of our school are damaged, what caused the damage, and what can we do to repair it?"</a:t>
             </a:r>
             <a:endParaRPr lang="en-US" sz="4000" dirty="0"/>
           </a:p>
@@ -6943,7 +7299,7 @@
                 <a:ea typeface="Times New Roman" pitchFamily="34" charset="-122"/>
                 <a:cs typeface="Times New Roman" pitchFamily="34" charset="-120"/>
               </a:rPr>
-              <a:t>The school environment is damaged and needs solutions.</a:t>
+              <a:t>The school environment is damaged, and the class must find the causes and the solutions.</a:t>
             </a:r>
             <a:endParaRPr lang="en-US" sz="4000" dirty="0"/>
           </a:p>
@@ -9285,7 +9641,7 @@
                 <a:ea typeface="Times New Roman" pitchFamily="34" charset="-122"/>
                 <a:cs typeface="Times New Roman" pitchFamily="34" charset="-120"/>
               </a:rPr>
-              <a:t>Recall four types of human aggression on the environment.</a:t>
+              <a:t>What is the damage shown in this picture?</a:t>
             </a:r>
             <a:endParaRPr lang="en-US" sz="4000" dirty="0"/>
           </a:p>
@@ -9504,7 +9860,7 @@
                 <a:ea typeface="Times New Roman" pitchFamily="34" charset="-122"/>
                 <a:cs typeface="Times New Roman" pitchFamily="34" charset="-120"/>
               </a:rPr>
-              <a:t>Cutting trees, bush fires, dumping rubbish and digging or trampling the soil (also poaching).</a:t>
+              <a:t>Trees have been cut and burnt: it is deforestation.</a:t>
             </a:r>
             <a:endParaRPr lang="en-US" sz="4000" dirty="0"/>
           </a:p>
@@ -9937,7 +10293,7 @@
                 <a:ea typeface="Times New Roman" pitchFamily="34" charset="-122"/>
                 <a:cs typeface="Times New Roman" pitchFamily="34" charset="-120"/>
               </a:rPr>
-              <a:t>What should you write in your notebook for each damaged place you observe?</a:t>
+              <a:t>What should you write in your notebook for each damaged place?</a:t>
             </a:r>
             <a:endParaRPr lang="en-US" sz="4000" dirty="0"/>
           </a:p>
@@ -11241,7 +11597,7 @@
                 <a:ea typeface="Times New Roman" pitchFamily="34" charset="-122"/>
                 <a:cs typeface="Times New Roman" pitchFamily="34" charset="-120"/>
               </a:rPr>
-              <a:t>Explain why these damages happen around the school.</a:t>
+              <a:t>Why is the grass burnt around some schools?</a:t>
             </a:r>
             <a:endParaRPr lang="en-US" sz="4000" dirty="0"/>
           </a:p>
@@ -12062,7 +12418,7 @@
                           <a:ea typeface="Calibri" pitchFamily="34" charset="-122"/>
                           <a:cs typeface="Calibri" pitchFamily="34" charset="-120"/>
                         </a:rPr>
-                        <a:t>Outdoor activity: visit the school surroundings; observe, identify, describe and explain the human aggressions on the environment; propose solutions.</a:t>
+                        <a:t>Theoretical basis (in class): recall the different types of human aggression on natural regions. Practical exercise (outdoor activity): visit the school surroundings; observe, identify, describe and explain the aggressions; identify and propose solutions.</a:t>
                       </a:r>
                       <a:endParaRPr lang="en-US" sz="1700" dirty="0">
                         <a:latin typeface="Calibri" charset="0"/>
@@ -12469,7 +12825,7 @@
                 <a:ea typeface="Times New Roman" pitchFamily="34" charset="-122"/>
                 <a:cs typeface="Times New Roman" pitchFamily="34" charset="-120"/>
               </a:rPr>
-              <a:t>People throw rubbish, cut trees, walk on the grass and burn grass or waste.</a:t>
+              <a:t>People burn rubbish or grass to clear the place.</a:t>
             </a:r>
             <a:endParaRPr lang="en-US" sz="4000" dirty="0"/>
           </a:p>
@@ -12902,7 +13258,7 @@
                 <a:ea typeface="Times New Roman" pitchFamily="34" charset="-122"/>
                 <a:cs typeface="Times New Roman" pitchFamily="34" charset="-120"/>
               </a:rPr>
-              <a:t>Give three solutions for the school.</a:t>
+              <a:t>What can our class do to protect the school environment?</a:t>
             </a:r>
             <a:endParaRPr lang="en-US" sz="4000" dirty="0"/>
           </a:p>
@@ -13121,7 +13477,7 @@
                 <a:ea typeface="Times New Roman" pitchFamily="34" charset="-122"/>
                 <a:cs typeface="Times New Roman" pitchFamily="34" charset="-120"/>
               </a:rPr>
-              <a:t>Plant trees and grass, put dustbins and sort waste, and make paths to protect the soil.</a:t>
+              <a:t>Plant trees and grass, use dustbins and walk on the paths.</a:t>
             </a:r>
             <a:endParaRPr lang="en-US" sz="4000" dirty="0"/>
           </a:p>
@@ -13515,7 +13871,7 @@
         <p:spPr>
           <a:xfrm>
             <a:off x="0" y="658368"/>
-            <a:ext cx="3840480" cy="5833872"/>
+            <a:ext cx="5120640" cy="5833872"/>
           </a:xfrm>
           <a:prstGeom prst="rect">
             <a:avLst/>
@@ -13530,8 +13886,8 @@
         </p:nvSpPr>
         <p:spPr>
           <a:xfrm>
-            <a:off x="4069080" y="1005840"/>
-            <a:ext cx="7802575" cy="731520"/>
+            <a:off x="5349240" y="1005840"/>
+            <a:ext cx="6522415" cy="731520"/>
           </a:xfrm>
           <a:prstGeom prst="rect">
             <a:avLst/>
@@ -13557,7 +13913,7 @@
                 <a:ea typeface="Times New Roman" pitchFamily="34" charset="-122"/>
                 <a:cs typeface="Times New Roman" pitchFamily="34" charset="-120"/>
               </a:rPr>
-              <a:t>1. Theoretical Basis</a:t>
+              <a:t>DEFINITIONS</a:t>
             </a:r>
             <a:endParaRPr lang="en-US" sz="3600" dirty="0"/>
           </a:p>
@@ -13571,8 +13927,8 @@
         </p:nvSpPr>
         <p:spPr>
           <a:xfrm>
-            <a:off x="4069080" y="1783080"/>
-            <a:ext cx="7802575" cy="4663440"/>
+            <a:off x="5349240" y="1783080"/>
+            <a:ext cx="6522415" cy="4663440"/>
           </a:xfrm>
           <a:prstGeom prst="rect">
             <a:avLst/>
@@ -13599,7 +13955,7 @@
                 <a:ea typeface="Times New Roman" pitchFamily="34" charset="-122"/>
                 <a:cs typeface="Times New Roman" pitchFamily="34" charset="-120"/>
               </a:rPr>
-              <a:t>People damage the natural environment in the following ways:</a:t>
+              <a:t>The key terms of this lesson are defined as follows:</a:t>
             </a:r>
             <a:endParaRPr lang="en-US" sz="4000" dirty="0"/>
           </a:p>
@@ -13619,7 +13975,7 @@
                 <a:ea typeface="Times New Roman" pitchFamily="34" charset="-122"/>
                 <a:cs typeface="Times New Roman" pitchFamily="34" charset="-120"/>
               </a:rPr>
-              <a:t>Deforestation: </a:t>
+              <a:t>Human aggression: </a:t>
             </a:r>
             <a:pPr algn="l" indent="0" marL="0">
               <a:spcAft>
@@ -13636,44 +13992,7 @@
                 <a:ea typeface="Times New Roman" pitchFamily="34" charset="-122"/>
                 <a:cs typeface="Times New Roman" pitchFamily="34" charset="-120"/>
               </a:rPr>
-              <a:t>Trees are cut for wood, building or space.</a:t>
-            </a:r>
-            <a:endParaRPr lang="en-US" sz="4000" dirty="0"/>
-          </a:p>
-          <a:p>
-            <a:pPr algn="l" indent="0" marL="0">
-              <a:spcAft>
-                <a:spcPts val="800"/>
-              </a:spcAft>
-              <a:buNone/>
-            </a:pPr>
-            <a:r>
-              <a:rPr lang="en-US" sz="4000" b="1" dirty="0">
-                <a:solidFill>
-                  <a:srgbClr val="111111"/>
-                </a:solidFill>
-                <a:latin typeface="Times New Roman" pitchFamily="34" charset="0"/>
-                <a:ea typeface="Times New Roman" pitchFamily="34" charset="-122"/>
-                <a:cs typeface="Times New Roman" pitchFamily="34" charset="-120"/>
-              </a:rPr>
-              <a:t>Pollution: </a:t>
-            </a:r>
-            <a:pPr algn="l" indent="0" marL="0">
-              <a:spcAft>
-                <a:spcPts val="800"/>
-              </a:spcAft>
-              <a:buNone/>
-            </a:pPr>
-            <a:r>
-              <a:rPr lang="en-US" sz="4000" dirty="0">
-                <a:solidFill>
-                  <a:srgbClr val="111111"/>
-                </a:solidFill>
-                <a:latin typeface="Times New Roman" pitchFamily="34" charset="0"/>
-                <a:ea typeface="Times New Roman" pitchFamily="34" charset="-122"/>
-                <a:cs typeface="Times New Roman" pitchFamily="34" charset="-120"/>
-              </a:rPr>
-              <a:t>Rubbish, plastics and smoke make the environment dirty.</a:t>
+              <a:t>It is any human action that damages the natural environment.</a:t>
             </a:r>
             <a:endParaRPr lang="en-US" sz="4000" dirty="0"/>
           </a:p>
@@ -13791,9 +14110,129 @@
           </a:p>
         </p:txBody>
       </p:sp>
+      <p:sp>
+        <p:nvSpPr>
+          <p:cNvPr id="3" name="Text 1"/>
+          <p:cNvSpPr/>
+          <p:nvPr/>
+        </p:nvSpPr>
+        <p:spPr>
+          <a:xfrm>
+            <a:off x="365760" y="1005840"/>
+            <a:ext cx="11460175" cy="731520"/>
+          </a:xfrm>
+          <a:prstGeom prst="rect">
+            <a:avLst/>
+          </a:prstGeom>
+          <a:noFill/>
+          <a:ln/>
+        </p:spPr>
+        <p:txBody>
+          <a:bodyPr wrap="square" lIns="0" tIns="0" rIns="0" bIns="0" rtlCol="0" anchor="ctr">
+            <a:normAutofit/>
+          </a:bodyPr>
+          <a:lstStyle/>
+          <a:p>
+            <a:pPr algn="ctr" indent="0" marL="0">
+              <a:buNone/>
+            </a:pPr>
+            <a:r>
+              <a:rPr lang="en-US" sz="3600" b="1" dirty="0">
+                <a:solidFill>
+                  <a:srgbClr val="990011"/>
+                </a:solidFill>
+                <a:latin typeface="Times New Roman" pitchFamily="34" charset="0"/>
+                <a:ea typeface="Times New Roman" pitchFamily="34" charset="-122"/>
+                <a:cs typeface="Times New Roman" pitchFamily="34" charset="-120"/>
+              </a:rPr>
+              <a:t>1. Types of Human Aggression on the Environment</a:t>
+            </a:r>
+            <a:endParaRPr lang="en-US" sz="3600" dirty="0"/>
+          </a:p>
+        </p:txBody>
+      </p:sp>
+      <p:sp>
+        <p:nvSpPr>
+          <p:cNvPr id="4" name="Text 2"/>
+          <p:cNvSpPr/>
+          <p:nvPr/>
+        </p:nvSpPr>
+        <p:spPr>
+          <a:xfrm>
+            <a:off x="365760" y="1783080"/>
+            <a:ext cx="4846320" cy="4617720"/>
+          </a:xfrm>
+          <a:prstGeom prst="rect">
+            <a:avLst/>
+          </a:prstGeom>
+          <a:noFill/>
+          <a:ln/>
+        </p:spPr>
+        <p:txBody>
+          <a:bodyPr wrap="square" lIns="0" tIns="0" rIns="0" bIns="0" rtlCol="0" anchor="t"/>
+          <a:lstStyle/>
+          <a:p>
+            <a:pPr algn="l" indent="0" marL="0">
+              <a:spcAft>
+                <a:spcPts val="800"/>
+              </a:spcAft>
+              <a:buNone/>
+            </a:pPr>
+            <a:r>
+              <a:rPr lang="en-US" sz="3600" i="1" dirty="0">
+                <a:solidFill>
+                  <a:srgbClr val="111111"/>
+                </a:solidFill>
+                <a:latin typeface="Times New Roman" pitchFamily="34" charset="0"/>
+                <a:ea typeface="Times New Roman" pitchFamily="34" charset="-122"/>
+                <a:cs typeface="Times New Roman" pitchFamily="34" charset="-120"/>
+              </a:rPr>
+              <a:t>People damage the natural environment in the following ways:</a:t>
+            </a:r>
+            <a:endParaRPr lang="en-US" sz="3600" dirty="0"/>
+          </a:p>
+          <a:p>
+            <a:pPr algn="l" indent="0" marL="0">
+              <a:spcAft>
+                <a:spcPts val="800"/>
+              </a:spcAft>
+              <a:buNone/>
+            </a:pPr>
+            <a:r>
+              <a:rPr lang="en-US" sz="3600" b="1" dirty="0">
+                <a:solidFill>
+                  <a:srgbClr val="111111"/>
+                </a:solidFill>
+                <a:latin typeface="Times New Roman" pitchFamily="34" charset="0"/>
+                <a:ea typeface="Times New Roman" pitchFamily="34" charset="-122"/>
+                <a:cs typeface="Times New Roman" pitchFamily="34" charset="-120"/>
+              </a:rPr>
+              <a:t>Deforestation: </a:t>
+            </a:r>
+            <a:pPr algn="l" indent="0" marL="0">
+              <a:spcAft>
+                <a:spcPts val="800"/>
+              </a:spcAft>
+              <a:buNone/>
+            </a:pPr>
+            <a:r>
+              <a:rPr lang="en-US" sz="3600" dirty="0">
+                <a:solidFill>
+                  <a:srgbClr val="111111"/>
+                </a:solidFill>
+                <a:latin typeface="Times New Roman" pitchFamily="34" charset="0"/>
+                <a:ea typeface="Times New Roman" pitchFamily="34" charset="-122"/>
+                <a:cs typeface="Times New Roman" pitchFamily="34" charset="-120"/>
+              </a:rPr>
+              <a:t>Trees are cut for wood, building or space.</a:t>
+            </a:r>
+            <a:endParaRPr lang="en-US" sz="3600" dirty="0"/>
+          </a:p>
+        </p:txBody>
+      </p:sp>
       <p:pic>
         <p:nvPicPr>
-          <p:cNvPr id="3" name="Image 0" descr="/home/claude/f4/img/minesec_sheet.png">    </p:cNvPr>
+          <p:cNvPr id="5" name="Image 0" descr="/home/claude/f4/img/v2/f2t_clearing.jpg">    </p:cNvPr>
           <p:cNvPicPr>
             <a:picLocks noChangeAspect="1"/>
           </p:cNvPicPr>
@@ -13807,8 +14246,8 @@
         </p:blipFill>
         <p:spPr>
           <a:xfrm>
-            <a:off x="0" y="658368"/>
-            <a:ext cx="5120640" cy="5833872"/>
+            <a:off x="5349240" y="2071212"/>
+            <a:ext cx="6659575" cy="3693983"/>
           </a:xfrm>
           <a:prstGeom prst="rect">
             <a:avLst/>
@@ -13817,14 +14256,14 @@
       </p:pic>
       <p:sp>
         <p:nvSpPr>
-          <p:cNvPr id="4" name="Text 1"/>
+          <p:cNvPr id="6" name="Text 3"/>
           <p:cNvSpPr/>
           <p:nvPr/>
         </p:nvSpPr>
         <p:spPr>
           <a:xfrm>
-            <a:off x="5349240" y="1005840"/>
-            <a:ext cx="6522415" cy="731520"/>
+            <a:off x="5349240" y="6089904"/>
+            <a:ext cx="6659575" cy="347472"/>
           </a:xfrm>
           <a:prstGeom prst="rect">
             <a:avLst/>
@@ -13833,85 +14272,24 @@
           <a:ln/>
         </p:spPr>
         <p:txBody>
-          <a:bodyPr wrap="square" lIns="0" tIns="0" rIns="0" bIns="0" rtlCol="0" anchor="ctr">
-            <a:normAutofit/>
-          </a:bodyPr>
+          <a:bodyPr wrap="square" lIns="0" tIns="0" rIns="0" bIns="0" rtlCol="0" anchor="ctr"/>
           <a:lstStyle/>
           <a:p>
             <a:pPr algn="ctr" indent="0" marL="0">
               <a:buNone/>
             </a:pPr>
             <a:r>
-              <a:rPr lang="en-US" sz="3600" b="1" dirty="0">
-                <a:solidFill>
-                  <a:srgbClr val="990011"/>
+              <a:rPr lang="en-US" sz="1600" i="1" dirty="0">
+                <a:solidFill>
+                  <a:srgbClr val="555555"/>
                 </a:solidFill>
                 <a:latin typeface="Times New Roman" pitchFamily="34" charset="0"/>
                 <a:ea typeface="Times New Roman" pitchFamily="34" charset="-122"/>
                 <a:cs typeface="Times New Roman" pitchFamily="34" charset="-120"/>
               </a:rPr>
-              <a:t>1. Theoretical Basis (continued)</a:t>
-            </a:r>
-            <a:endParaRPr lang="en-US" sz="3600" dirty="0"/>
-          </a:p>
-        </p:txBody>
-      </p:sp>
-      <p:sp>
-        <p:nvSpPr>
-          <p:cNvPr id="5" name="Text 2"/>
-          <p:cNvSpPr/>
-          <p:nvPr/>
-        </p:nvSpPr>
-        <p:spPr>
-          <a:xfrm>
-            <a:off x="5349240" y="1783080"/>
-            <a:ext cx="6522415" cy="4663440"/>
-          </a:xfrm>
-          <a:prstGeom prst="rect">
-            <a:avLst/>
-          </a:prstGeom>
-          <a:noFill/>
-          <a:ln/>
-        </p:spPr>
-        <p:txBody>
-          <a:bodyPr wrap="square" lIns="0" tIns="0" rIns="0" bIns="0" rtlCol="0" anchor="t"/>
-          <a:lstStyle/>
-          <a:p>
-            <a:pPr algn="l" indent="0" marL="0">
-              <a:spcAft>
-                <a:spcPts val="800"/>
-              </a:spcAft>
-              <a:buNone/>
-            </a:pPr>
-            <a:r>
-              <a:rPr lang="en-US" sz="4000" b="1" dirty="0">
-                <a:solidFill>
-                  <a:srgbClr val="111111"/>
-                </a:solidFill>
-                <a:latin typeface="Times New Roman" pitchFamily="34" charset="0"/>
-                <a:ea typeface="Times New Roman" pitchFamily="34" charset="-122"/>
-                <a:cs typeface="Times New Roman" pitchFamily="34" charset="-120"/>
-              </a:rPr>
-              <a:t>Soil degradation: </a:t>
-            </a:r>
-            <a:pPr algn="l" indent="0" marL="0">
-              <a:spcAft>
-                <a:spcPts val="800"/>
-              </a:spcAft>
-              <a:buNone/>
-            </a:pPr>
-            <a:r>
-              <a:rPr lang="en-US" sz="4000" dirty="0">
-                <a:solidFill>
-                  <a:srgbClr val="111111"/>
-                </a:solidFill>
-                <a:latin typeface="Times New Roman" pitchFamily="34" charset="0"/>
-                <a:ea typeface="Times New Roman" pitchFamily="34" charset="-122"/>
-                <a:cs typeface="Times New Roman" pitchFamily="34" charset="-120"/>
-              </a:rPr>
-              <a:t>Bare soil is trampled and washed away by rain.</a:t>
-            </a:r>
-            <a:endParaRPr lang="en-US" sz="4000" dirty="0"/>
+              <a:t>Illustration: cut trees</a:t>
+            </a:r>
+            <a:endParaRPr lang="en-US" sz="1600" dirty="0"/>
           </a:p>
         </p:txBody>
       </p:sp>
@@ -14027,9 +14405,109 @@
           </a:p>
         </p:txBody>
       </p:sp>
+      <p:sp>
+        <p:nvSpPr>
+          <p:cNvPr id="3" name="Text 1"/>
+          <p:cNvSpPr/>
+          <p:nvPr/>
+        </p:nvSpPr>
+        <p:spPr>
+          <a:xfrm>
+            <a:off x="365760" y="1005840"/>
+            <a:ext cx="11460175" cy="731520"/>
+          </a:xfrm>
+          <a:prstGeom prst="rect">
+            <a:avLst/>
+          </a:prstGeom>
+          <a:noFill/>
+          <a:ln/>
+        </p:spPr>
+        <p:txBody>
+          <a:bodyPr wrap="square" lIns="0" tIns="0" rIns="0" bIns="0" rtlCol="0" anchor="ctr">
+            <a:normAutofit/>
+          </a:bodyPr>
+          <a:lstStyle/>
+          <a:p>
+            <a:pPr algn="ctr" indent="0" marL="0">
+              <a:buNone/>
+            </a:pPr>
+            <a:r>
+              <a:rPr lang="en-US" sz="3600" b="1" dirty="0">
+                <a:solidFill>
+                  <a:srgbClr val="990011"/>
+                </a:solidFill>
+                <a:latin typeface="Times New Roman" pitchFamily="34" charset="0"/>
+                <a:ea typeface="Times New Roman" pitchFamily="34" charset="-122"/>
+                <a:cs typeface="Times New Roman" pitchFamily="34" charset="-120"/>
+              </a:rPr>
+              <a:t>1. Types of Human Aggression on the Environment</a:t>
+            </a:r>
+            <a:endParaRPr lang="en-US" sz="3600" dirty="0"/>
+          </a:p>
+        </p:txBody>
+      </p:sp>
+      <p:sp>
+        <p:nvSpPr>
+          <p:cNvPr id="4" name="Text 2"/>
+          <p:cNvSpPr/>
+          <p:nvPr/>
+        </p:nvSpPr>
+        <p:spPr>
+          <a:xfrm>
+            <a:off x="365760" y="1783080"/>
+            <a:ext cx="4846320" cy="4617720"/>
+          </a:xfrm>
+          <a:prstGeom prst="rect">
+            <a:avLst/>
+          </a:prstGeom>
+          <a:noFill/>
+          <a:ln/>
+        </p:spPr>
+        <p:txBody>
+          <a:bodyPr wrap="square" lIns="0" tIns="0" rIns="0" bIns="0" rtlCol="0" anchor="t"/>
+          <a:lstStyle/>
+          <a:p>
+            <a:pPr algn="l" indent="0" marL="0">
+              <a:spcAft>
+                <a:spcPts val="800"/>
+              </a:spcAft>
+              <a:buNone/>
+            </a:pPr>
+            <a:r>
+              <a:rPr lang="en-US" sz="3600" b="1" dirty="0">
+                <a:solidFill>
+                  <a:srgbClr val="111111"/>
+                </a:solidFill>
+                <a:latin typeface="Times New Roman" pitchFamily="34" charset="0"/>
+                <a:ea typeface="Times New Roman" pitchFamily="34" charset="-122"/>
+                <a:cs typeface="Times New Roman" pitchFamily="34" charset="-120"/>
+              </a:rPr>
+              <a:t>Bush fires: </a:t>
+            </a:r>
+            <a:pPr algn="l" indent="0" marL="0">
+              <a:spcAft>
+                <a:spcPts val="800"/>
+              </a:spcAft>
+              <a:buNone/>
+            </a:pPr>
+            <a:r>
+              <a:rPr lang="en-US" sz="3600" dirty="0">
+                <a:solidFill>
+                  <a:srgbClr val="111111"/>
+                </a:solidFill>
+                <a:latin typeface="Times New Roman" pitchFamily="34" charset="0"/>
+                <a:ea typeface="Times New Roman" pitchFamily="34" charset="-122"/>
+                <a:cs typeface="Times New Roman" pitchFamily="34" charset="-120"/>
+              </a:rPr>
+              <a:t>Grass and rubbish are burnt and leave the soil bare.</a:t>
+            </a:r>
+            <a:endParaRPr lang="en-US" sz="3600" dirty="0"/>
+          </a:p>
+        </p:txBody>
+      </p:sp>
       <p:pic>
         <p:nvPicPr>
-          <p:cNvPr id="3" name="Image 0" descr="/home/claude/f4/img/minesec_sheet.png">    </p:cNvPr>
+          <p:cNvPr id="5" name="Image 0" descr="/home/claude/f4/img/v2/f2t_bushfire.jpg">    </p:cNvPr>
           <p:cNvPicPr>
             <a:picLocks noChangeAspect="1"/>
           </p:cNvPicPr>
@@ -14043,8 +14521,8 @@
         </p:blipFill>
         <p:spPr>
           <a:xfrm>
-            <a:off x="0" y="658368"/>
-            <a:ext cx="5120640" cy="5833872"/>
+            <a:off x="5349240" y="2071212"/>
+            <a:ext cx="6659575" cy="3693983"/>
           </a:xfrm>
           <a:prstGeom prst="rect">
             <a:avLst/>
@@ -14053,14 +14531,14 @@
       </p:pic>
       <p:sp>
         <p:nvSpPr>
-          <p:cNvPr id="4" name="Text 1"/>
+          <p:cNvPr id="6" name="Text 3"/>
           <p:cNvSpPr/>
           <p:nvPr/>
         </p:nvSpPr>
         <p:spPr>
           <a:xfrm>
-            <a:off x="5349240" y="1005840"/>
-            <a:ext cx="6522415" cy="731520"/>
+            <a:off x="5349240" y="6089904"/>
+            <a:ext cx="6659575" cy="347472"/>
           </a:xfrm>
           <a:prstGeom prst="rect">
             <a:avLst/>
@@ -14069,142 +14547,24 @@
           <a:ln/>
         </p:spPr>
         <p:txBody>
-          <a:bodyPr wrap="square" lIns="0" tIns="0" rIns="0" bIns="0" rtlCol="0" anchor="ctr">
-            <a:normAutofit/>
-          </a:bodyPr>
+          <a:bodyPr wrap="square" lIns="0" tIns="0" rIns="0" bIns="0" rtlCol="0" anchor="ctr"/>
           <a:lstStyle/>
           <a:p>
             <a:pPr algn="ctr" indent="0" marL="0">
               <a:buNone/>
             </a:pPr>
             <a:r>
-              <a:rPr lang="en-US" sz="3600" b="1" dirty="0">
-                <a:solidFill>
-                  <a:srgbClr val="990011"/>
+              <a:rPr lang="en-US" sz="1600" i="1" dirty="0">
+                <a:solidFill>
+                  <a:srgbClr val="555555"/>
                 </a:solidFill>
                 <a:latin typeface="Times New Roman" pitchFamily="34" charset="0"/>
                 <a:ea typeface="Times New Roman" pitchFamily="34" charset="-122"/>
                 <a:cs typeface="Times New Roman" pitchFamily="34" charset="-120"/>
               </a:rPr>
-              <a:t>2. Method of the Field Visit</a:t>
-            </a:r>
-            <a:endParaRPr lang="en-US" sz="3600" dirty="0"/>
-          </a:p>
-        </p:txBody>
-      </p:sp>
-      <p:sp>
-        <p:nvSpPr>
-          <p:cNvPr id="5" name="Text 2"/>
-          <p:cNvSpPr/>
-          <p:nvPr/>
-        </p:nvSpPr>
-        <p:spPr>
-          <a:xfrm>
-            <a:off x="5349240" y="1783080"/>
-            <a:ext cx="6522415" cy="4663440"/>
-          </a:xfrm>
-          <a:prstGeom prst="rect">
-            <a:avLst/>
-          </a:prstGeom>
-          <a:noFill/>
-          <a:ln/>
-        </p:spPr>
-        <p:txBody>
-          <a:bodyPr wrap="square" lIns="0" tIns="0" rIns="0" bIns="0" rtlCol="0" anchor="t"/>
-          <a:lstStyle/>
-          <a:p>
-            <a:pPr algn="l" indent="0" marL="0">
-              <a:spcAft>
-                <a:spcPts val="800"/>
-              </a:spcAft>
-              <a:buNone/>
-            </a:pPr>
-            <a:r>
-              <a:rPr lang="en-US" sz="4000" i="1" dirty="0">
-                <a:solidFill>
-                  <a:srgbClr val="111111"/>
-                </a:solidFill>
-                <a:latin typeface="Times New Roman" pitchFamily="34" charset="0"/>
-                <a:ea typeface="Times New Roman" pitchFamily="34" charset="-122"/>
-                <a:cs typeface="Times New Roman" pitchFamily="34" charset="-120"/>
-              </a:rPr>
-              <a:t>The field visit is carried out in the following steps:</a:t>
-            </a:r>
-            <a:endParaRPr lang="en-US" sz="4000" dirty="0"/>
-          </a:p>
-          <a:p>
-            <a:pPr algn="l" indent="0" marL="0">
-              <a:spcAft>
-                <a:spcPts val="800"/>
-              </a:spcAft>
-              <a:buNone/>
-            </a:pPr>
-            <a:r>
-              <a:rPr lang="en-US" sz="4000" b="1" dirty="0">
-                <a:solidFill>
-                  <a:srgbClr val="111111"/>
-                </a:solidFill>
-                <a:latin typeface="Times New Roman" pitchFamily="34" charset="0"/>
-                <a:ea typeface="Times New Roman" pitchFamily="34" charset="-122"/>
-                <a:cs typeface="Times New Roman" pitchFamily="34" charset="-120"/>
-              </a:rPr>
-              <a:t>Step 1: </a:t>
-            </a:r>
-            <a:pPr algn="l" indent="0" marL="0">
-              <a:spcAft>
-                <a:spcPts val="800"/>
-              </a:spcAft>
-              <a:buNone/>
-            </a:pPr>
-            <a:r>
-              <a:rPr lang="en-US" sz="4000" dirty="0">
-                <a:solidFill>
-                  <a:srgbClr val="111111"/>
-                </a:solidFill>
-                <a:latin typeface="Times New Roman" pitchFamily="34" charset="0"/>
-                <a:ea typeface="Times New Roman" pitchFamily="34" charset="-122"/>
-                <a:cs typeface="Times New Roman" pitchFamily="34" charset="-120"/>
-              </a:rPr>
-              <a:t>We walk around the school in groups with a notebook.</a:t>
-            </a:r>
-            <a:endParaRPr lang="en-US" sz="4000" dirty="0"/>
-          </a:p>
-          <a:p>
-            <a:pPr algn="l" indent="0" marL="0">
-              <a:spcAft>
-                <a:spcPts val="800"/>
-              </a:spcAft>
-              <a:buNone/>
-            </a:pPr>
-            <a:r>
-              <a:rPr lang="en-US" sz="4000" b="1" dirty="0">
-                <a:solidFill>
-                  <a:srgbClr val="111111"/>
-                </a:solidFill>
-                <a:latin typeface="Times New Roman" pitchFamily="34" charset="0"/>
-                <a:ea typeface="Times New Roman" pitchFamily="34" charset="-122"/>
-                <a:cs typeface="Times New Roman" pitchFamily="34" charset="-120"/>
-              </a:rPr>
-              <a:t>Step 2: </a:t>
-            </a:r>
-            <a:pPr algn="l" indent="0" marL="0">
-              <a:spcAft>
-                <a:spcPts val="800"/>
-              </a:spcAft>
-              <a:buNone/>
-            </a:pPr>
-            <a:r>
-              <a:rPr lang="en-US" sz="4000" dirty="0">
-                <a:solidFill>
-                  <a:srgbClr val="111111"/>
-                </a:solidFill>
-                <a:latin typeface="Times New Roman" pitchFamily="34" charset="0"/>
-                <a:ea typeface="Times New Roman" pitchFamily="34" charset="-122"/>
-                <a:cs typeface="Times New Roman" pitchFamily="34" charset="-120"/>
-              </a:rPr>
-              <a:t>We observe and identify each damaged place.</a:t>
-            </a:r>
-            <a:endParaRPr lang="en-US" sz="4000" dirty="0"/>
+              <a:t>Illustration: burnt grass</a:t>
+            </a:r>
+            <a:endParaRPr lang="en-US" sz="1600" dirty="0"/>
           </a:p>
         </p:txBody>
       </p:sp>
@@ -14320,9 +14680,109 @@
           </a:p>
         </p:txBody>
       </p:sp>
+      <p:sp>
+        <p:nvSpPr>
+          <p:cNvPr id="3" name="Text 1"/>
+          <p:cNvSpPr/>
+          <p:nvPr/>
+        </p:nvSpPr>
+        <p:spPr>
+          <a:xfrm>
+            <a:off x="365760" y="1005840"/>
+            <a:ext cx="11460175" cy="731520"/>
+          </a:xfrm>
+          <a:prstGeom prst="rect">
+            <a:avLst/>
+          </a:prstGeom>
+          <a:noFill/>
+          <a:ln/>
+        </p:spPr>
+        <p:txBody>
+          <a:bodyPr wrap="square" lIns="0" tIns="0" rIns="0" bIns="0" rtlCol="0" anchor="ctr">
+            <a:normAutofit/>
+          </a:bodyPr>
+          <a:lstStyle/>
+          <a:p>
+            <a:pPr algn="ctr" indent="0" marL="0">
+              <a:buNone/>
+            </a:pPr>
+            <a:r>
+              <a:rPr lang="en-US" sz="3600" b="1" dirty="0">
+                <a:solidFill>
+                  <a:srgbClr val="990011"/>
+                </a:solidFill>
+                <a:latin typeface="Times New Roman" pitchFamily="34" charset="0"/>
+                <a:ea typeface="Times New Roman" pitchFamily="34" charset="-122"/>
+                <a:cs typeface="Times New Roman" pitchFamily="34" charset="-120"/>
+              </a:rPr>
+              <a:t>1. Types of Human Aggression on the Environment</a:t>
+            </a:r>
+            <a:endParaRPr lang="en-US" sz="3600" dirty="0"/>
+          </a:p>
+        </p:txBody>
+      </p:sp>
+      <p:sp>
+        <p:nvSpPr>
+          <p:cNvPr id="4" name="Text 2"/>
+          <p:cNvSpPr/>
+          <p:nvPr/>
+        </p:nvSpPr>
+        <p:spPr>
+          <a:xfrm>
+            <a:off x="365760" y="1783080"/>
+            <a:ext cx="4846320" cy="4617720"/>
+          </a:xfrm>
+          <a:prstGeom prst="rect">
+            <a:avLst/>
+          </a:prstGeom>
+          <a:noFill/>
+          <a:ln/>
+        </p:spPr>
+        <p:txBody>
+          <a:bodyPr wrap="square" lIns="0" tIns="0" rIns="0" bIns="0" rtlCol="0" anchor="t"/>
+          <a:lstStyle/>
+          <a:p>
+            <a:pPr algn="l" indent="0" marL="0">
+              <a:spcAft>
+                <a:spcPts val="800"/>
+              </a:spcAft>
+              <a:buNone/>
+            </a:pPr>
+            <a:r>
+              <a:rPr lang="en-US" sz="3600" b="1" dirty="0">
+                <a:solidFill>
+                  <a:srgbClr val="111111"/>
+                </a:solidFill>
+                <a:latin typeface="Times New Roman" pitchFamily="34" charset="0"/>
+                <a:ea typeface="Times New Roman" pitchFamily="34" charset="-122"/>
+                <a:cs typeface="Times New Roman" pitchFamily="34" charset="-120"/>
+              </a:rPr>
+              <a:t>Pollution: </a:t>
+            </a:r>
+            <a:pPr algn="l" indent="0" marL="0">
+              <a:spcAft>
+                <a:spcPts val="800"/>
+              </a:spcAft>
+              <a:buNone/>
+            </a:pPr>
+            <a:r>
+              <a:rPr lang="en-US" sz="3600" dirty="0">
+                <a:solidFill>
+                  <a:srgbClr val="111111"/>
+                </a:solidFill>
+                <a:latin typeface="Times New Roman" pitchFamily="34" charset="0"/>
+                <a:ea typeface="Times New Roman" pitchFamily="34" charset="-122"/>
+                <a:cs typeface="Times New Roman" pitchFamily="34" charset="-120"/>
+              </a:rPr>
+              <a:t>Rubbish, plastics and smoke make the environment dirty.</a:t>
+            </a:r>
+            <a:endParaRPr lang="en-US" sz="3600" dirty="0"/>
+          </a:p>
+        </p:txBody>
+      </p:sp>
       <p:pic>
         <p:nvPicPr>
-          <p:cNvPr id="3" name="Image 0" descr="/home/claude/f4/img/minesec_sheet.png">    </p:cNvPr>
+          <p:cNvPr id="5" name="Image 0" descr="/home/claude/f4/img/v2/usa_litter.jpg">    </p:cNvPr>
           <p:cNvPicPr>
             <a:picLocks noChangeAspect="1"/>
           </p:cNvPicPr>
@@ -14336,8 +14796,8 @@
         </p:blipFill>
         <p:spPr>
           <a:xfrm>
-            <a:off x="0" y="658368"/>
-            <a:ext cx="5120640" cy="5833872"/>
+            <a:off x="5349240" y="2071212"/>
+            <a:ext cx="6659575" cy="3693983"/>
           </a:xfrm>
           <a:prstGeom prst="rect">
             <a:avLst/>
@@ -14346,14 +14806,14 @@
       </p:pic>
       <p:sp>
         <p:nvSpPr>
-          <p:cNvPr id="4" name="Text 1"/>
+          <p:cNvPr id="6" name="Text 3"/>
           <p:cNvSpPr/>
           <p:nvPr/>
         </p:nvSpPr>
         <p:spPr>
           <a:xfrm>
-            <a:off x="5349240" y="1005840"/>
-            <a:ext cx="6522415" cy="731520"/>
+            <a:off x="5349240" y="6089904"/>
+            <a:ext cx="6659575" cy="347472"/>
           </a:xfrm>
           <a:prstGeom prst="rect">
             <a:avLst/>
@@ -14362,122 +14822,24 @@
           <a:ln/>
         </p:spPr>
         <p:txBody>
-          <a:bodyPr wrap="square" lIns="0" tIns="0" rIns="0" bIns="0" rtlCol="0" anchor="ctr">
-            <a:normAutofit/>
-          </a:bodyPr>
+          <a:bodyPr wrap="square" lIns="0" tIns="0" rIns="0" bIns="0" rtlCol="0" anchor="ctr"/>
           <a:lstStyle/>
           <a:p>
             <a:pPr algn="ctr" indent="0" marL="0">
               <a:buNone/>
             </a:pPr>
             <a:r>
-              <a:rPr lang="en-US" sz="3600" b="1" dirty="0">
-                <a:solidFill>
-                  <a:srgbClr val="990011"/>
+              <a:rPr lang="en-US" sz="1600" i="1" dirty="0">
+                <a:solidFill>
+                  <a:srgbClr val="555555"/>
                 </a:solidFill>
                 <a:latin typeface="Times New Roman" pitchFamily="34" charset="0"/>
                 <a:ea typeface="Times New Roman" pitchFamily="34" charset="-122"/>
                 <a:cs typeface="Times New Roman" pitchFamily="34" charset="-120"/>
               </a:rPr>
-              <a:t>2. Method of the Field Visit (continued)</a:t>
-            </a:r>
-            <a:endParaRPr lang="en-US" sz="3600" dirty="0"/>
-          </a:p>
-        </p:txBody>
-      </p:sp>
-      <p:sp>
-        <p:nvSpPr>
-          <p:cNvPr id="5" name="Text 2"/>
-          <p:cNvSpPr/>
-          <p:nvPr/>
-        </p:nvSpPr>
-        <p:spPr>
-          <a:xfrm>
-            <a:off x="5349240" y="1783080"/>
-            <a:ext cx="6522415" cy="4663440"/>
-          </a:xfrm>
-          <a:prstGeom prst="rect">
-            <a:avLst/>
-          </a:prstGeom>
-          <a:noFill/>
-          <a:ln/>
-        </p:spPr>
-        <p:txBody>
-          <a:bodyPr wrap="square" lIns="0" tIns="0" rIns="0" bIns="0" rtlCol="0" anchor="t"/>
-          <a:lstStyle/>
-          <a:p>
-            <a:pPr algn="l" indent="0" marL="0">
-              <a:spcAft>
-                <a:spcPts val="800"/>
-              </a:spcAft>
-              <a:buNone/>
-            </a:pPr>
-            <a:r>
-              <a:rPr lang="en-US" sz="4000" b="1" dirty="0">
-                <a:solidFill>
-                  <a:srgbClr val="111111"/>
-                </a:solidFill>
-                <a:latin typeface="Times New Roman" pitchFamily="34" charset="0"/>
-                <a:ea typeface="Times New Roman" pitchFamily="34" charset="-122"/>
-                <a:cs typeface="Times New Roman" pitchFamily="34" charset="-120"/>
-              </a:rPr>
-              <a:t>Step 3: </a:t>
-            </a:r>
-            <a:pPr algn="l" indent="0" marL="0">
-              <a:spcAft>
-                <a:spcPts val="800"/>
-              </a:spcAft>
-              <a:buNone/>
-            </a:pPr>
-            <a:r>
-              <a:rPr lang="en-US" sz="4000" dirty="0">
-                <a:solidFill>
-                  <a:srgbClr val="111111"/>
-                </a:solidFill>
-                <a:latin typeface="Times New Roman" pitchFamily="34" charset="0"/>
-                <a:ea typeface="Times New Roman" pitchFamily="34" charset="-122"/>
-                <a:cs typeface="Times New Roman" pitchFamily="34" charset="-120"/>
-              </a:rPr>
-              <a:t>We describe the damage and explain its cause.</a:t>
-            </a:r>
-            <a:endParaRPr lang="en-US" sz="4000" dirty="0"/>
-          </a:p>
-          <a:p>
-            <a:pPr algn="l" indent="0" marL="0">
-              <a:spcAft>
-                <a:spcPts val="800"/>
-              </a:spcAft>
-              <a:buNone/>
-            </a:pPr>
-            <a:r>
-              <a:rPr lang="en-US" sz="4000" b="1" dirty="0">
-                <a:solidFill>
-                  <a:srgbClr val="111111"/>
-                </a:solidFill>
-                <a:latin typeface="Times New Roman" pitchFamily="34" charset="0"/>
-                <a:ea typeface="Times New Roman" pitchFamily="34" charset="-122"/>
-                <a:cs typeface="Times New Roman" pitchFamily="34" charset="-120"/>
-              </a:rPr>
-              <a:t>Step 4: </a:t>
-            </a:r>
-            <a:pPr algn="l" indent="0" marL="0">
-              <a:spcAft>
-                <a:spcPts val="800"/>
-              </a:spcAft>
-              <a:buNone/>
-            </a:pPr>
-            <a:r>
-              <a:rPr lang="en-US" sz="4000" dirty="0">
-                <a:solidFill>
-                  <a:srgbClr val="111111"/>
-                </a:solidFill>
-                <a:latin typeface="Times New Roman" pitchFamily="34" charset="0"/>
-                <a:ea typeface="Times New Roman" pitchFamily="34" charset="-122"/>
-                <a:cs typeface="Times New Roman" pitchFamily="34" charset="-120"/>
-              </a:rPr>
-              <a:t>We propose a practical solution for each problem.</a:t>
-            </a:r>
-            <a:endParaRPr lang="en-US" sz="4000" dirty="0"/>
+              <a:t>Illustration: rubbish</a:t>
+            </a:r>
+            <a:endParaRPr lang="en-US" sz="1600" dirty="0"/>
           </a:p>
         </p:txBody>
       </p:sp>
@@ -14593,9 +14955,109 @@
           </a:p>
         </p:txBody>
       </p:sp>
+      <p:sp>
+        <p:nvSpPr>
+          <p:cNvPr id="3" name="Text 1"/>
+          <p:cNvSpPr/>
+          <p:nvPr/>
+        </p:nvSpPr>
+        <p:spPr>
+          <a:xfrm>
+            <a:off x="365760" y="1005840"/>
+            <a:ext cx="11460175" cy="731520"/>
+          </a:xfrm>
+          <a:prstGeom prst="rect">
+            <a:avLst/>
+          </a:prstGeom>
+          <a:noFill/>
+          <a:ln/>
+        </p:spPr>
+        <p:txBody>
+          <a:bodyPr wrap="square" lIns="0" tIns="0" rIns="0" bIns="0" rtlCol="0" anchor="ctr">
+            <a:normAutofit/>
+          </a:bodyPr>
+          <a:lstStyle/>
+          <a:p>
+            <a:pPr algn="ctr" indent="0" marL="0">
+              <a:buNone/>
+            </a:pPr>
+            <a:r>
+              <a:rPr lang="en-US" sz="3600" b="1" dirty="0">
+                <a:solidFill>
+                  <a:srgbClr val="990011"/>
+                </a:solidFill>
+                <a:latin typeface="Times New Roman" pitchFamily="34" charset="0"/>
+                <a:ea typeface="Times New Roman" pitchFamily="34" charset="-122"/>
+                <a:cs typeface="Times New Roman" pitchFamily="34" charset="-120"/>
+              </a:rPr>
+              <a:t>1. Types of Human Aggression on the Environment</a:t>
+            </a:r>
+            <a:endParaRPr lang="en-US" sz="3600" dirty="0"/>
+          </a:p>
+        </p:txBody>
+      </p:sp>
+      <p:sp>
+        <p:nvSpPr>
+          <p:cNvPr id="4" name="Text 2"/>
+          <p:cNvSpPr/>
+          <p:nvPr/>
+        </p:nvSpPr>
+        <p:spPr>
+          <a:xfrm>
+            <a:off x="365760" y="1783080"/>
+            <a:ext cx="4846320" cy="4617720"/>
+          </a:xfrm>
+          <a:prstGeom prst="rect">
+            <a:avLst/>
+          </a:prstGeom>
+          <a:noFill/>
+          <a:ln/>
+        </p:spPr>
+        <p:txBody>
+          <a:bodyPr wrap="square" lIns="0" tIns="0" rIns="0" bIns="0" rtlCol="0" anchor="t"/>
+          <a:lstStyle/>
+          <a:p>
+            <a:pPr algn="l" indent="0" marL="0">
+              <a:spcAft>
+                <a:spcPts val="800"/>
+              </a:spcAft>
+              <a:buNone/>
+            </a:pPr>
+            <a:r>
+              <a:rPr lang="en-US" sz="3600" b="1" dirty="0">
+                <a:solidFill>
+                  <a:srgbClr val="111111"/>
+                </a:solidFill>
+                <a:latin typeface="Times New Roman" pitchFamily="34" charset="0"/>
+                <a:ea typeface="Times New Roman" pitchFamily="34" charset="-122"/>
+                <a:cs typeface="Times New Roman" pitchFamily="34" charset="-120"/>
+              </a:rPr>
+              <a:t>Soil degradation: </a:t>
+            </a:r>
+            <a:pPr algn="l" indent="0" marL="0">
+              <a:spcAft>
+                <a:spcPts val="800"/>
+              </a:spcAft>
+              <a:buNone/>
+            </a:pPr>
+            <a:r>
+              <a:rPr lang="en-US" sz="3600" dirty="0">
+                <a:solidFill>
+                  <a:srgbClr val="111111"/>
+                </a:solidFill>
+                <a:latin typeface="Times New Roman" pitchFamily="34" charset="0"/>
+                <a:ea typeface="Times New Roman" pitchFamily="34" charset="-122"/>
+                <a:cs typeface="Times New Roman" pitchFamily="34" charset="-120"/>
+              </a:rPr>
+              <a:t>Bare soil is trampled and washed away by rain.</a:t>
+            </a:r>
+            <a:endParaRPr lang="en-US" sz="3600" dirty="0"/>
+          </a:p>
+        </p:txBody>
+      </p:sp>
       <p:pic>
         <p:nvPicPr>
-          <p:cNvPr id="3" name="Image 0" descr="/home/claude/f4/img/minesec_sheet.png">    </p:cNvPr>
+          <p:cNvPr id="5" name="Image 0" descr="/home/claude/f4/img/v2/f4_gully.jpg">    </p:cNvPr>
           <p:cNvPicPr>
             <a:picLocks noChangeAspect="1"/>
           </p:cNvPicPr>
@@ -14609,8 +15071,8 @@
         </p:blipFill>
         <p:spPr>
           <a:xfrm>
-            <a:off x="0" y="658368"/>
-            <a:ext cx="5120640" cy="5833872"/>
+            <a:off x="5349240" y="2071212"/>
+            <a:ext cx="6659575" cy="3693983"/>
           </a:xfrm>
           <a:prstGeom prst="rect">
             <a:avLst/>
@@ -14619,14 +15081,14 @@
       </p:pic>
       <p:sp>
         <p:nvSpPr>
-          <p:cNvPr id="4" name="Text 1"/>
+          <p:cNvPr id="6" name="Text 3"/>
           <p:cNvSpPr/>
           <p:nvPr/>
         </p:nvSpPr>
         <p:spPr>
           <a:xfrm>
-            <a:off x="5349240" y="1005840"/>
-            <a:ext cx="6522415" cy="731520"/>
+            <a:off x="5349240" y="6089904"/>
+            <a:ext cx="6659575" cy="347472"/>
           </a:xfrm>
           <a:prstGeom prst="rect">
             <a:avLst/>
@@ -14635,142 +15097,24 @@
           <a:ln/>
         </p:spPr>
         <p:txBody>
-          <a:bodyPr wrap="square" lIns="0" tIns="0" rIns="0" bIns="0" rtlCol="0" anchor="ctr">
-            <a:normAutofit/>
-          </a:bodyPr>
+          <a:bodyPr wrap="square" lIns="0" tIns="0" rIns="0" bIns="0" rtlCol="0" anchor="ctr"/>
           <a:lstStyle/>
           <a:p>
             <a:pPr algn="ctr" indent="0" marL="0">
               <a:buNone/>
             </a:pPr>
             <a:r>
-              <a:rPr lang="en-US" sz="3600" b="1" dirty="0">
-                <a:solidFill>
-                  <a:srgbClr val="990011"/>
+              <a:rPr lang="en-US" sz="1600" i="1" dirty="0">
+                <a:solidFill>
+                  <a:srgbClr val="555555"/>
                 </a:solidFill>
                 <a:latin typeface="Times New Roman" pitchFamily="34" charset="0"/>
                 <a:ea typeface="Times New Roman" pitchFamily="34" charset="-122"/>
                 <a:cs typeface="Times New Roman" pitchFamily="34" charset="-120"/>
               </a:rPr>
-              <a:t>3. Solutions for the School</a:t>
-            </a:r>
-            <a:endParaRPr lang="en-US" sz="3600" dirty="0"/>
-          </a:p>
-        </p:txBody>
-      </p:sp>
-      <p:sp>
-        <p:nvSpPr>
-          <p:cNvPr id="5" name="Text 2"/>
-          <p:cNvSpPr/>
-          <p:nvPr/>
-        </p:nvSpPr>
-        <p:spPr>
-          <a:xfrm>
-            <a:off x="5349240" y="1783080"/>
-            <a:ext cx="6522415" cy="4663440"/>
-          </a:xfrm>
-          <a:prstGeom prst="rect">
-            <a:avLst/>
-          </a:prstGeom>
-          <a:noFill/>
-          <a:ln/>
-        </p:spPr>
-        <p:txBody>
-          <a:bodyPr wrap="square" lIns="0" tIns="0" rIns="0" bIns="0" rtlCol="0" anchor="t"/>
-          <a:lstStyle/>
-          <a:p>
-            <a:pPr algn="l" indent="0" marL="0">
-              <a:spcAft>
-                <a:spcPts val="800"/>
-              </a:spcAft>
-              <a:buNone/>
-            </a:pPr>
-            <a:r>
-              <a:rPr lang="en-US" sz="4000" i="1" dirty="0">
-                <a:solidFill>
-                  <a:srgbClr val="111111"/>
-                </a:solidFill>
-                <a:latin typeface="Times New Roman" pitchFamily="34" charset="0"/>
-                <a:ea typeface="Times New Roman" pitchFamily="34" charset="-122"/>
-                <a:cs typeface="Times New Roman" pitchFamily="34" charset="-120"/>
-              </a:rPr>
-              <a:t>The school environment can be protected by the following actions:</a:t>
-            </a:r>
-            <a:endParaRPr lang="en-US" sz="4000" dirty="0"/>
-          </a:p>
-          <a:p>
-            <a:pPr algn="l" indent="0" marL="0">
-              <a:spcAft>
-                <a:spcPts val="800"/>
-              </a:spcAft>
-              <a:buNone/>
-            </a:pPr>
-            <a:r>
-              <a:rPr lang="en-US" sz="4000" b="1" dirty="0">
-                <a:solidFill>
-                  <a:srgbClr val="111111"/>
-                </a:solidFill>
-                <a:latin typeface="Times New Roman" pitchFamily="34" charset="0"/>
-                <a:ea typeface="Times New Roman" pitchFamily="34" charset="-122"/>
-                <a:cs typeface="Times New Roman" pitchFamily="34" charset="-120"/>
-              </a:rPr>
-              <a:t>Planting: </a:t>
-            </a:r>
-            <a:pPr algn="l" indent="0" marL="0">
-              <a:spcAft>
-                <a:spcPts val="800"/>
-              </a:spcAft>
-              <a:buNone/>
-            </a:pPr>
-            <a:r>
-              <a:rPr lang="en-US" sz="4000" dirty="0">
-                <a:solidFill>
-                  <a:srgbClr val="111111"/>
-                </a:solidFill>
-                <a:latin typeface="Times New Roman" pitchFamily="34" charset="0"/>
-                <a:ea typeface="Times New Roman" pitchFamily="34" charset="-122"/>
-                <a:cs typeface="Times New Roman" pitchFamily="34" charset="-120"/>
-              </a:rPr>
-              <a:t>We plant trees and grass on bare areas.</a:t>
-            </a:r>
-            <a:endParaRPr lang="en-US" sz="4000" dirty="0"/>
-          </a:p>
-          <a:p>
-            <a:pPr algn="l" indent="0" marL="0">
-              <a:spcAft>
-                <a:spcPts val="800"/>
-              </a:spcAft>
-              <a:buNone/>
-            </a:pPr>
-            <a:r>
-              <a:rPr lang="en-US" sz="4000" b="1" dirty="0">
-                <a:solidFill>
-                  <a:srgbClr val="111111"/>
-                </a:solidFill>
-                <a:latin typeface="Times New Roman" pitchFamily="34" charset="0"/>
-                <a:ea typeface="Times New Roman" pitchFamily="34" charset="-122"/>
-                <a:cs typeface="Times New Roman" pitchFamily="34" charset="-120"/>
-              </a:rPr>
-              <a:t>Waste management: </a:t>
-            </a:r>
-            <a:pPr algn="l" indent="0" marL="0">
-              <a:spcAft>
-                <a:spcPts val="800"/>
-              </a:spcAft>
-              <a:buNone/>
-            </a:pPr>
-            <a:r>
-              <a:rPr lang="en-US" sz="4000" dirty="0">
-                <a:solidFill>
-                  <a:srgbClr val="111111"/>
-                </a:solidFill>
-                <a:latin typeface="Times New Roman" pitchFamily="34" charset="0"/>
-                <a:ea typeface="Times New Roman" pitchFamily="34" charset="-122"/>
-                <a:cs typeface="Times New Roman" pitchFamily="34" charset="-120"/>
-              </a:rPr>
-              <a:t>We put dustbins and sort the waste.</a:t>
-            </a:r>
-            <a:endParaRPr lang="en-US" sz="4000" dirty="0"/>
+              <a:t>Illustration: a gully</a:t>
+            </a:r>
+            <a:endParaRPr lang="en-US" sz="1600" dirty="0"/>
           </a:p>
         </p:txBody>
       </p:sp>
@@ -15184,7 +15528,7 @@
                 <a:ea typeface="Times New Roman" pitchFamily="34" charset="-122"/>
                 <a:cs typeface="Times New Roman" pitchFamily="34" charset="-120"/>
               </a:rPr>
-              <a:t>3. Solutions for the School (continued)</a:t>
+              <a:t>2. Method of the Field Visit</a:t>
             </a:r>
             <a:endParaRPr lang="en-US" sz="3600" dirty="0"/>
           </a:p>
@@ -15218,7 +15562,7 @@
               <a:buNone/>
             </a:pPr>
             <a:r>
-              <a:rPr lang="en-US" sz="4000" b="1" dirty="0">
+              <a:rPr lang="en-US" sz="4000" i="1" dirty="0">
                 <a:solidFill>
                   <a:srgbClr val="111111"/>
                 </a:solidFill>
@@ -15226,8 +15570,11 @@
                 <a:ea typeface="Times New Roman" pitchFamily="34" charset="-122"/>
                 <a:cs typeface="Times New Roman" pitchFamily="34" charset="-120"/>
               </a:rPr>
-              <a:t>Good behaviour: </a:t>
-            </a:r>
+              <a:t>The field visit is carried out in the following steps:</a:t>
+            </a:r>
+            <a:endParaRPr lang="en-US" sz="4000" dirty="0"/>
+          </a:p>
+          <a:p>
             <a:pPr algn="l" indent="0" marL="0">
               <a:spcAft>
                 <a:spcPts val="800"/>
@@ -15235,7 +15582,7 @@
               <a:buNone/>
             </a:pPr>
             <a:r>
-              <a:rPr lang="en-US" sz="4000" dirty="0">
+              <a:rPr lang="en-US" sz="4000" b="1" dirty="0">
                 <a:solidFill>
                   <a:srgbClr val="111111"/>
                 </a:solidFill>
@@ -15243,7 +15590,61 @@
                 <a:ea typeface="Times New Roman" pitchFamily="34" charset="-122"/>
                 <a:cs typeface="Times New Roman" pitchFamily="34" charset="-120"/>
               </a:rPr>
-              <a:t>We use paths and stop burning rubbish and grass.</a:t>
+              <a:t>Step 1: </a:t>
+            </a:r>
+            <a:pPr algn="l" indent="0" marL="0">
+              <a:spcAft>
+                <a:spcPts val="800"/>
+              </a:spcAft>
+              <a:buNone/>
+            </a:pPr>
+            <a:r>
+              <a:rPr lang="en-US" sz="4000" dirty="0">
+                <a:solidFill>
+                  <a:srgbClr val="111111"/>
+                </a:solidFill>
+                <a:latin typeface="Times New Roman" pitchFamily="34" charset="0"/>
+                <a:ea typeface="Times New Roman" pitchFamily="34" charset="-122"/>
+                <a:cs typeface="Times New Roman" pitchFamily="34" charset="-120"/>
+              </a:rPr>
+              <a:t>We walk around the school in groups with a notebook.</a:t>
+            </a:r>
+            <a:endParaRPr lang="en-US" sz="4000" dirty="0"/>
+          </a:p>
+          <a:p>
+            <a:pPr algn="l" indent="0" marL="0">
+              <a:spcAft>
+                <a:spcPts val="800"/>
+              </a:spcAft>
+              <a:buNone/>
+            </a:pPr>
+            <a:r>
+              <a:rPr lang="en-US" sz="4000" b="1" dirty="0">
+                <a:solidFill>
+                  <a:srgbClr val="111111"/>
+                </a:solidFill>
+                <a:latin typeface="Times New Roman" pitchFamily="34" charset="0"/>
+                <a:ea typeface="Times New Roman" pitchFamily="34" charset="-122"/>
+                <a:cs typeface="Times New Roman" pitchFamily="34" charset="-120"/>
+              </a:rPr>
+              <a:t>Step 2: </a:t>
+            </a:r>
+            <a:pPr algn="l" indent="0" marL="0">
+              <a:spcAft>
+                <a:spcPts val="800"/>
+              </a:spcAft>
+              <a:buNone/>
+            </a:pPr>
+            <a:r>
+              <a:rPr lang="en-US" sz="4000" dirty="0">
+                <a:solidFill>
+                  <a:srgbClr val="111111"/>
+                </a:solidFill>
+                <a:latin typeface="Times New Roman" pitchFamily="34" charset="0"/>
+                <a:ea typeface="Times New Roman" pitchFamily="34" charset="-122"/>
+                <a:cs typeface="Times New Roman" pitchFamily="34" charset="-120"/>
+              </a:rPr>
+              <a:t>We observe and identify each damaged place.</a:t>
             </a:r>
             <a:endParaRPr lang="en-US" sz="4000" dirty="0"/>
           </a:p>
@@ -15355,7 +15756,7 @@
                 <a:ea typeface="Calibri" pitchFamily="34" charset="-122"/>
                 <a:cs typeface="Calibri" pitchFamily="34" charset="-120"/>
               </a:rPr>
-              <a:t>FORMATIVE EVALUATION</a:t>
+              <a:t>BOARD SUMMARY</a:t>
             </a:r>
             <a:endParaRPr lang="en-US" sz="1400" dirty="0"/>
           </a:p>
@@ -15420,7 +15821,7 @@
                 <a:ea typeface="Times New Roman" pitchFamily="34" charset="-122"/>
                 <a:cs typeface="Times New Roman" pitchFamily="34" charset="-120"/>
               </a:rPr>
-              <a:t>Evaluation 1</a:t>
+              <a:t>2. Method of the Field Visit (continued)</a:t>
             </a:r>
             <a:endParaRPr lang="en-US" sz="3600" dirty="0"/>
           </a:p>
@@ -15454,7 +15855,7 @@
               <a:buNone/>
             </a:pPr>
             <a:r>
-              <a:rPr lang="en-US" sz="4000" dirty="0">
+              <a:rPr lang="en-US" sz="4000" b="1" dirty="0">
                 <a:solidFill>
                   <a:srgbClr val="111111"/>
                 </a:solidFill>
@@ -15462,7 +15863,61 @@
                 <a:ea typeface="Times New Roman" pitchFamily="34" charset="-122"/>
                 <a:cs typeface="Times New Roman" pitchFamily="34" charset="-120"/>
               </a:rPr>
-              <a:t>Name two forms of degradation observed around the school.</a:t>
+              <a:t>Step 3: </a:t>
+            </a:r>
+            <a:pPr algn="l" indent="0" marL="0">
+              <a:spcAft>
+                <a:spcPts val="800"/>
+              </a:spcAft>
+              <a:buNone/>
+            </a:pPr>
+            <a:r>
+              <a:rPr lang="en-US" sz="4000" dirty="0">
+                <a:solidFill>
+                  <a:srgbClr val="111111"/>
+                </a:solidFill>
+                <a:latin typeface="Times New Roman" pitchFamily="34" charset="0"/>
+                <a:ea typeface="Times New Roman" pitchFamily="34" charset="-122"/>
+                <a:cs typeface="Times New Roman" pitchFamily="34" charset="-120"/>
+              </a:rPr>
+              <a:t>We describe the damage and explain its cause.</a:t>
+            </a:r>
+            <a:endParaRPr lang="en-US" sz="4000" dirty="0"/>
+          </a:p>
+          <a:p>
+            <a:pPr algn="l" indent="0" marL="0">
+              <a:spcAft>
+                <a:spcPts val="800"/>
+              </a:spcAft>
+              <a:buNone/>
+            </a:pPr>
+            <a:r>
+              <a:rPr lang="en-US" sz="4000" b="1" dirty="0">
+                <a:solidFill>
+                  <a:srgbClr val="111111"/>
+                </a:solidFill>
+                <a:latin typeface="Times New Roman" pitchFamily="34" charset="0"/>
+                <a:ea typeface="Times New Roman" pitchFamily="34" charset="-122"/>
+                <a:cs typeface="Times New Roman" pitchFamily="34" charset="-120"/>
+              </a:rPr>
+              <a:t>Step 4: </a:t>
+            </a:r>
+            <a:pPr algn="l" indent="0" marL="0">
+              <a:spcAft>
+                <a:spcPts val="800"/>
+              </a:spcAft>
+              <a:buNone/>
+            </a:pPr>
+            <a:r>
+              <a:rPr lang="en-US" sz="4000" dirty="0">
+                <a:solidFill>
+                  <a:srgbClr val="111111"/>
+                </a:solidFill>
+                <a:latin typeface="Times New Roman" pitchFamily="34" charset="0"/>
+                <a:ea typeface="Times New Roman" pitchFamily="34" charset="-122"/>
+                <a:cs typeface="Times New Roman" pitchFamily="34" charset="-120"/>
+              </a:rPr>
+              <a:t>We propose a practical solution for each problem.</a:t>
             </a:r>
             <a:endParaRPr lang="en-US" sz="4000" dirty="0"/>
           </a:p>
@@ -15574,15 +16029,135 @@
                 <a:ea typeface="Calibri" pitchFamily="34" charset="-122"/>
                 <a:cs typeface="Calibri" pitchFamily="34" charset="-120"/>
               </a:rPr>
-              <a:t>FORMATIVE EVALUATION</a:t>
+              <a:t>BOARD SUMMARY</a:t>
             </a:r>
             <a:endParaRPr lang="en-US" sz="1400" dirty="0"/>
+          </a:p>
+        </p:txBody>
+      </p:sp>
+      <p:sp>
+        <p:nvSpPr>
+          <p:cNvPr id="3" name="Text 1"/>
+          <p:cNvSpPr/>
+          <p:nvPr/>
+        </p:nvSpPr>
+        <p:spPr>
+          <a:xfrm>
+            <a:off x="365760" y="1005840"/>
+            <a:ext cx="11460175" cy="731520"/>
+          </a:xfrm>
+          <a:prstGeom prst="rect">
+            <a:avLst/>
+          </a:prstGeom>
+          <a:noFill/>
+          <a:ln/>
+        </p:spPr>
+        <p:txBody>
+          <a:bodyPr wrap="square" lIns="0" tIns="0" rIns="0" bIns="0" rtlCol="0" anchor="ctr">
+            <a:normAutofit/>
+          </a:bodyPr>
+          <a:lstStyle/>
+          <a:p>
+            <a:pPr algn="ctr" indent="0" marL="0">
+              <a:buNone/>
+            </a:pPr>
+            <a:r>
+              <a:rPr lang="en-US" sz="3600" b="1" dirty="0">
+                <a:solidFill>
+                  <a:srgbClr val="990011"/>
+                </a:solidFill>
+                <a:latin typeface="Times New Roman" pitchFamily="34" charset="0"/>
+                <a:ea typeface="Times New Roman" pitchFamily="34" charset="-122"/>
+                <a:cs typeface="Times New Roman" pitchFamily="34" charset="-120"/>
+              </a:rPr>
+              <a:t>3. Solutions for the School</a:t>
+            </a:r>
+            <a:endParaRPr lang="en-US" sz="3600" dirty="0"/>
+          </a:p>
+        </p:txBody>
+      </p:sp>
+      <p:sp>
+        <p:nvSpPr>
+          <p:cNvPr id="4" name="Text 2"/>
+          <p:cNvSpPr/>
+          <p:nvPr/>
+        </p:nvSpPr>
+        <p:spPr>
+          <a:xfrm>
+            <a:off x="365760" y="1783080"/>
+            <a:ext cx="4846320" cy="4617720"/>
+          </a:xfrm>
+          <a:prstGeom prst="rect">
+            <a:avLst/>
+          </a:prstGeom>
+          <a:noFill/>
+          <a:ln/>
+        </p:spPr>
+        <p:txBody>
+          <a:bodyPr wrap="square" lIns="0" tIns="0" rIns="0" bIns="0" rtlCol="0" anchor="t"/>
+          <a:lstStyle/>
+          <a:p>
+            <a:pPr algn="l" indent="0" marL="0">
+              <a:spcAft>
+                <a:spcPts val="800"/>
+              </a:spcAft>
+              <a:buNone/>
+            </a:pPr>
+            <a:r>
+              <a:rPr lang="en-US" sz="3600" i="1" dirty="0">
+                <a:solidFill>
+                  <a:srgbClr val="111111"/>
+                </a:solidFill>
+                <a:latin typeface="Times New Roman" pitchFamily="34" charset="0"/>
+                <a:ea typeface="Times New Roman" pitchFamily="34" charset="-122"/>
+                <a:cs typeface="Times New Roman" pitchFamily="34" charset="-120"/>
+              </a:rPr>
+              <a:t>The school environment can be protected by the following actions:</a:t>
+            </a:r>
+            <a:endParaRPr lang="en-US" sz="3600" dirty="0"/>
+          </a:p>
+          <a:p>
+            <a:pPr algn="l" indent="0" marL="0">
+              <a:spcAft>
+                <a:spcPts val="800"/>
+              </a:spcAft>
+              <a:buNone/>
+            </a:pPr>
+            <a:r>
+              <a:rPr lang="en-US" sz="3600" b="1" dirty="0">
+                <a:solidFill>
+                  <a:srgbClr val="111111"/>
+                </a:solidFill>
+                <a:latin typeface="Times New Roman" pitchFamily="34" charset="0"/>
+                <a:ea typeface="Times New Roman" pitchFamily="34" charset="-122"/>
+                <a:cs typeface="Times New Roman" pitchFamily="34" charset="-120"/>
+              </a:rPr>
+              <a:t>Planting: </a:t>
+            </a:r>
+            <a:pPr algn="l" indent="0" marL="0">
+              <a:spcAft>
+                <a:spcPts val="800"/>
+              </a:spcAft>
+              <a:buNone/>
+            </a:pPr>
+            <a:r>
+              <a:rPr lang="en-US" sz="3600" dirty="0">
+                <a:solidFill>
+                  <a:srgbClr val="111111"/>
+                </a:solidFill>
+                <a:latin typeface="Times New Roman" pitchFamily="34" charset="0"/>
+                <a:ea typeface="Times New Roman" pitchFamily="34" charset="-122"/>
+                <a:cs typeface="Times New Roman" pitchFamily="34" charset="-120"/>
+              </a:rPr>
+              <a:t>We plant trees and grass on bare areas.</a:t>
+            </a:r>
+            <a:endParaRPr lang="en-US" sz="3600" dirty="0"/>
           </a:p>
         </p:txBody>
       </p:sp>
       <p:pic>
         <p:nvPicPr>
-          <p:cNvPr id="3" name="Image 0" descr="/home/claude/f4/img/minesec_sheet.png">    </p:cNvPr>
+          <p:cNvPr id="5" name="Image 0" descr="/home/claude/f4/img/v2/f2t_tree_planting.jpg">    </p:cNvPr>
           <p:cNvPicPr>
             <a:picLocks noChangeAspect="1"/>
           </p:cNvPicPr>
@@ -15596,8 +16171,8 @@
         </p:blipFill>
         <p:spPr>
           <a:xfrm>
-            <a:off x="0" y="658368"/>
-            <a:ext cx="5120640" cy="5833872"/>
+            <a:off x="5349240" y="2071212"/>
+            <a:ext cx="6659575" cy="3693983"/>
           </a:xfrm>
           <a:prstGeom prst="rect">
             <a:avLst/>
@@ -15606,14 +16181,14 @@
       </p:pic>
       <p:sp>
         <p:nvSpPr>
-          <p:cNvPr id="4" name="Text 1"/>
+          <p:cNvPr id="6" name="Text 3"/>
           <p:cNvSpPr/>
           <p:nvPr/>
         </p:nvSpPr>
         <p:spPr>
           <a:xfrm>
-            <a:off x="5349240" y="1005840"/>
-            <a:ext cx="6522415" cy="731520"/>
+            <a:off x="5349240" y="6089904"/>
+            <a:ext cx="6659575" cy="347472"/>
           </a:xfrm>
           <a:prstGeom prst="rect">
             <a:avLst/>
@@ -15622,68 +16197,24 @@
           <a:ln/>
         </p:spPr>
         <p:txBody>
-          <a:bodyPr wrap="square" lIns="0" tIns="0" rIns="0" bIns="0" rtlCol="0" anchor="ctr">
-            <a:normAutofit/>
-          </a:bodyPr>
+          <a:bodyPr wrap="square" lIns="0" tIns="0" rIns="0" bIns="0" rtlCol="0" anchor="ctr"/>
           <a:lstStyle/>
           <a:p>
             <a:pPr algn="ctr" indent="0" marL="0">
               <a:buNone/>
             </a:pPr>
             <a:r>
-              <a:rPr lang="en-US" sz="3600" b="1" dirty="0">
-                <a:solidFill>
-                  <a:srgbClr val="990011"/>
+              <a:rPr lang="en-US" sz="1600" i="1" dirty="0">
+                <a:solidFill>
+                  <a:srgbClr val="555555"/>
                 </a:solidFill>
                 <a:latin typeface="Times New Roman" pitchFamily="34" charset="0"/>
                 <a:ea typeface="Times New Roman" pitchFamily="34" charset="-122"/>
                 <a:cs typeface="Times New Roman" pitchFamily="34" charset="-120"/>
               </a:rPr>
-              <a:t>Expected Answer</a:t>
-            </a:r>
-            <a:endParaRPr lang="en-US" sz="3600" dirty="0"/>
-          </a:p>
-        </p:txBody>
-      </p:sp>
-      <p:sp>
-        <p:nvSpPr>
-          <p:cNvPr id="5" name="Text 2"/>
-          <p:cNvSpPr/>
-          <p:nvPr/>
-        </p:nvSpPr>
-        <p:spPr>
-          <a:xfrm>
-            <a:off x="5349240" y="1783080"/>
-            <a:ext cx="6522415" cy="4663440"/>
-          </a:xfrm>
-          <a:prstGeom prst="rect">
-            <a:avLst/>
-          </a:prstGeom>
-          <a:noFill/>
-          <a:ln/>
-        </p:spPr>
-        <p:txBody>
-          <a:bodyPr wrap="square" lIns="0" tIns="0" rIns="0" bIns="0" rtlCol="0" anchor="t"/>
-          <a:lstStyle/>
-          <a:p>
-            <a:pPr algn="l" indent="0" marL="0">
-              <a:spcAft>
-                <a:spcPts val="800"/>
-              </a:spcAft>
-              <a:buNone/>
-            </a:pPr>
-            <a:r>
-              <a:rPr lang="en-US" sz="4000" dirty="0">
-                <a:solidFill>
-                  <a:srgbClr val="111111"/>
-                </a:solidFill>
-                <a:latin typeface="Times New Roman" pitchFamily="34" charset="0"/>
-                <a:ea typeface="Times New Roman" pitchFamily="34" charset="-122"/>
-                <a:cs typeface="Times New Roman" pitchFamily="34" charset="-120"/>
-              </a:rPr>
-              <a:t>Rubbish on the ground and bare, eroded soil (also cut trees).</a:t>
-            </a:r>
-            <a:endParaRPr lang="en-US" sz="4000" dirty="0"/>
+              <a:t>Illustration: planting a tree</a:t>
+            </a:r>
+            <a:endParaRPr lang="en-US" sz="1600" dirty="0"/>
           </a:p>
         </p:txBody>
       </p:sp>
@@ -15793,15 +16324,115 @@
                 <a:ea typeface="Calibri" pitchFamily="34" charset="-122"/>
                 <a:cs typeface="Calibri" pitchFamily="34" charset="-120"/>
               </a:rPr>
-              <a:t>FORMATIVE EVALUATION</a:t>
+              <a:t>BOARD SUMMARY</a:t>
             </a:r>
             <a:endParaRPr lang="en-US" sz="1400" dirty="0"/>
+          </a:p>
+        </p:txBody>
+      </p:sp>
+      <p:sp>
+        <p:nvSpPr>
+          <p:cNvPr id="3" name="Text 1"/>
+          <p:cNvSpPr/>
+          <p:nvPr/>
+        </p:nvSpPr>
+        <p:spPr>
+          <a:xfrm>
+            <a:off x="365760" y="1005840"/>
+            <a:ext cx="11460175" cy="731520"/>
+          </a:xfrm>
+          <a:prstGeom prst="rect">
+            <a:avLst/>
+          </a:prstGeom>
+          <a:noFill/>
+          <a:ln/>
+        </p:spPr>
+        <p:txBody>
+          <a:bodyPr wrap="square" lIns="0" tIns="0" rIns="0" bIns="0" rtlCol="0" anchor="ctr">
+            <a:normAutofit/>
+          </a:bodyPr>
+          <a:lstStyle/>
+          <a:p>
+            <a:pPr algn="ctr" indent="0" marL="0">
+              <a:buNone/>
+            </a:pPr>
+            <a:r>
+              <a:rPr lang="en-US" sz="3600" b="1" dirty="0">
+                <a:solidFill>
+                  <a:srgbClr val="990011"/>
+                </a:solidFill>
+                <a:latin typeface="Times New Roman" pitchFamily="34" charset="0"/>
+                <a:ea typeface="Times New Roman" pitchFamily="34" charset="-122"/>
+                <a:cs typeface="Times New Roman" pitchFamily="34" charset="-120"/>
+              </a:rPr>
+              <a:t>3. Solutions for the School</a:t>
+            </a:r>
+            <a:endParaRPr lang="en-US" sz="3600" dirty="0"/>
+          </a:p>
+        </p:txBody>
+      </p:sp>
+      <p:sp>
+        <p:nvSpPr>
+          <p:cNvPr id="4" name="Text 2"/>
+          <p:cNvSpPr/>
+          <p:nvPr/>
+        </p:nvSpPr>
+        <p:spPr>
+          <a:xfrm>
+            <a:off x="365760" y="1783080"/>
+            <a:ext cx="4846320" cy="4617720"/>
+          </a:xfrm>
+          <a:prstGeom prst="rect">
+            <a:avLst/>
+          </a:prstGeom>
+          <a:noFill/>
+          <a:ln/>
+        </p:spPr>
+        <p:txBody>
+          <a:bodyPr wrap="square" lIns="0" tIns="0" rIns="0" bIns="0" rtlCol="0" anchor="t"/>
+          <a:lstStyle/>
+          <a:p>
+            <a:pPr algn="l" indent="0" marL="0">
+              <a:spcAft>
+                <a:spcPts val="800"/>
+              </a:spcAft>
+              <a:buNone/>
+            </a:pPr>
+            <a:r>
+              <a:rPr lang="en-US" sz="3600" b="1" dirty="0">
+                <a:solidFill>
+                  <a:srgbClr val="111111"/>
+                </a:solidFill>
+                <a:latin typeface="Times New Roman" pitchFamily="34" charset="0"/>
+                <a:ea typeface="Times New Roman" pitchFamily="34" charset="-122"/>
+                <a:cs typeface="Times New Roman" pitchFamily="34" charset="-120"/>
+              </a:rPr>
+              <a:t>Waste management: </a:t>
+            </a:r>
+            <a:pPr algn="l" indent="0" marL="0">
+              <a:spcAft>
+                <a:spcPts val="800"/>
+              </a:spcAft>
+              <a:buNone/>
+            </a:pPr>
+            <a:r>
+              <a:rPr lang="en-US" sz="3600" dirty="0">
+                <a:solidFill>
+                  <a:srgbClr val="111111"/>
+                </a:solidFill>
+                <a:latin typeface="Times New Roman" pitchFamily="34" charset="0"/>
+                <a:ea typeface="Times New Roman" pitchFamily="34" charset="-122"/>
+                <a:cs typeface="Times New Roman" pitchFamily="34" charset="-120"/>
+              </a:rPr>
+              <a:t>We put dustbins and sort the waste.</a:t>
+            </a:r>
+            <a:endParaRPr lang="en-US" sz="3600" dirty="0"/>
           </a:p>
         </p:txBody>
       </p:sp>
       <p:pic>
         <p:nvPicPr>
-          <p:cNvPr id="3" name="Image 0" descr="/home/claude/f4/img/minesec_sheet.png">    </p:cNvPr>
+          <p:cNvPr id="5" name="Image 0" descr="/home/claude/f4/img/v2/waste_sort_big.png">    </p:cNvPr>
           <p:cNvPicPr>
             <a:picLocks noChangeAspect="1"/>
           </p:cNvPicPr>
@@ -15815,8 +16446,8 @@
         </p:blipFill>
         <p:spPr>
           <a:xfrm>
-            <a:off x="0" y="658368"/>
-            <a:ext cx="5120640" cy="5833872"/>
+            <a:off x="5349240" y="2617506"/>
+            <a:ext cx="6659575" cy="2601397"/>
           </a:xfrm>
           <a:prstGeom prst="rect">
             <a:avLst/>
@@ -15825,14 +16456,14 @@
       </p:pic>
       <p:sp>
         <p:nvSpPr>
-          <p:cNvPr id="4" name="Text 1"/>
+          <p:cNvPr id="6" name="Text 3"/>
           <p:cNvSpPr/>
           <p:nvPr/>
         </p:nvSpPr>
         <p:spPr>
           <a:xfrm>
-            <a:off x="5349240" y="1005840"/>
-            <a:ext cx="6522415" cy="731520"/>
+            <a:off x="5349240" y="6089904"/>
+            <a:ext cx="6659575" cy="347472"/>
           </a:xfrm>
           <a:prstGeom prst="rect">
             <a:avLst/>
@@ -15841,68 +16472,24 @@
           <a:ln/>
         </p:spPr>
         <p:txBody>
-          <a:bodyPr wrap="square" lIns="0" tIns="0" rIns="0" bIns="0" rtlCol="0" anchor="ctr">
-            <a:normAutofit/>
-          </a:bodyPr>
+          <a:bodyPr wrap="square" lIns="0" tIns="0" rIns="0" bIns="0" rtlCol="0" anchor="ctr"/>
           <a:lstStyle/>
           <a:p>
             <a:pPr algn="ctr" indent="0" marL="0">
               <a:buNone/>
             </a:pPr>
             <a:r>
-              <a:rPr lang="en-US" sz="3600" b="1" dirty="0">
-                <a:solidFill>
-                  <a:srgbClr val="990011"/>
+              <a:rPr lang="en-US" sz="1600" i="1" dirty="0">
+                <a:solidFill>
+                  <a:srgbClr val="555555"/>
                 </a:solidFill>
                 <a:latin typeface="Times New Roman" pitchFamily="34" charset="0"/>
                 <a:ea typeface="Times New Roman" pitchFamily="34" charset="-122"/>
                 <a:cs typeface="Times New Roman" pitchFamily="34" charset="-120"/>
               </a:rPr>
-              <a:t>Evaluation 2</a:t>
-            </a:r>
-            <a:endParaRPr lang="en-US" sz="3600" dirty="0"/>
-          </a:p>
-        </p:txBody>
-      </p:sp>
-      <p:sp>
-        <p:nvSpPr>
-          <p:cNvPr id="5" name="Text 2"/>
-          <p:cNvSpPr/>
-          <p:nvPr/>
-        </p:nvSpPr>
-        <p:spPr>
-          <a:xfrm>
-            <a:off x="5349240" y="1783080"/>
-            <a:ext cx="6522415" cy="4663440"/>
-          </a:xfrm>
-          <a:prstGeom prst="rect">
-            <a:avLst/>
-          </a:prstGeom>
-          <a:noFill/>
-          <a:ln/>
-        </p:spPr>
-        <p:txBody>
-          <a:bodyPr wrap="square" lIns="0" tIns="0" rIns="0" bIns="0" rtlCol="0" anchor="t"/>
-          <a:lstStyle/>
-          <a:p>
-            <a:pPr algn="l" indent="0" marL="0">
-              <a:spcAft>
-                <a:spcPts val="800"/>
-              </a:spcAft>
-              <a:buNone/>
-            </a:pPr>
-            <a:r>
-              <a:rPr lang="en-US" sz="4000" dirty="0">
-                <a:solidFill>
-                  <a:srgbClr val="111111"/>
-                </a:solidFill>
-                <a:latin typeface="Times New Roman" pitchFamily="34" charset="0"/>
-                <a:ea typeface="Times New Roman" pitchFamily="34" charset="-122"/>
-                <a:cs typeface="Times New Roman" pitchFamily="34" charset="-120"/>
-              </a:rPr>
-              <a:t>Propose two solutions.</a:t>
-            </a:r>
-            <a:endParaRPr lang="en-US" sz="4000" dirty="0"/>
+              <a:t>Illustration: sorting waste</a:t>
+            </a:r>
+            <a:endParaRPr lang="en-US" sz="1600" dirty="0"/>
           </a:p>
         </p:txBody>
       </p:sp>
@@ -16012,7 +16599,7 @@
                 <a:ea typeface="Calibri" pitchFamily="34" charset="-122"/>
                 <a:cs typeface="Calibri" pitchFamily="34" charset="-120"/>
               </a:rPr>
-              <a:t>FORMATIVE EVALUATION</a:t>
+              <a:t>BOARD SUMMARY</a:t>
             </a:r>
             <a:endParaRPr lang="en-US" sz="1400" dirty="0"/>
           </a:p>
@@ -16035,7 +16622,7 @@
         <p:spPr>
           <a:xfrm>
             <a:off x="0" y="658368"/>
-            <a:ext cx="5120640" cy="5833872"/>
+            <a:ext cx="3840480" cy="5833872"/>
           </a:xfrm>
           <a:prstGeom prst="rect">
             <a:avLst/>
@@ -16050,8 +16637,8 @@
         </p:nvSpPr>
         <p:spPr>
           <a:xfrm>
-            <a:off x="5349240" y="1005840"/>
-            <a:ext cx="6522415" cy="731520"/>
+            <a:off x="4069080" y="1005840"/>
+            <a:ext cx="7802575" cy="731520"/>
           </a:xfrm>
           <a:prstGeom prst="rect">
             <a:avLst/>
@@ -16077,7 +16664,7 @@
                 <a:ea typeface="Times New Roman" pitchFamily="34" charset="-122"/>
                 <a:cs typeface="Times New Roman" pitchFamily="34" charset="-120"/>
               </a:rPr>
-              <a:t>Expected Answer</a:t>
+              <a:t>3. Solutions for the School</a:t>
             </a:r>
             <a:endParaRPr lang="en-US" sz="3600" dirty="0"/>
           </a:p>
@@ -16091,8 +16678,8 @@
         </p:nvSpPr>
         <p:spPr>
           <a:xfrm>
-            <a:off x="5349240" y="1783080"/>
-            <a:ext cx="6522415" cy="4663440"/>
+            <a:off x="4069080" y="1783080"/>
+            <a:ext cx="7802575" cy="4663440"/>
           </a:xfrm>
           <a:prstGeom prst="rect">
             <a:avLst/>
@@ -16111,7 +16698,7 @@
               <a:buNone/>
             </a:pPr>
             <a:r>
-              <a:rPr lang="en-US" sz="4000" dirty="0">
+              <a:rPr lang="en-US" sz="4000" b="1" dirty="0">
                 <a:solidFill>
                   <a:srgbClr val="111111"/>
                 </a:solidFill>
@@ -16119,7 +16706,61 @@
                 <a:ea typeface="Times New Roman" pitchFamily="34" charset="-122"/>
                 <a:cs typeface="Times New Roman" pitchFamily="34" charset="-120"/>
               </a:rPr>
-              <a:t>Plant trees and put dustbins.</a:t>
+              <a:t>Protecting the soil: </a:t>
+            </a:r>
+            <a:pPr algn="l" indent="0" marL="0">
+              <a:spcAft>
+                <a:spcPts val="800"/>
+              </a:spcAft>
+              <a:buNone/>
+            </a:pPr>
+            <a:r>
+              <a:rPr lang="en-US" sz="4000" dirty="0">
+                <a:solidFill>
+                  <a:srgbClr val="111111"/>
+                </a:solidFill>
+                <a:latin typeface="Times New Roman" pitchFamily="34" charset="0"/>
+                <a:ea typeface="Times New Roman" pitchFamily="34" charset="-122"/>
+                <a:cs typeface="Times New Roman" pitchFamily="34" charset="-120"/>
+              </a:rPr>
+              <a:t>We use paths and make small barriers against running water.</a:t>
+            </a:r>
+            <a:endParaRPr lang="en-US" sz="4000" dirty="0"/>
+          </a:p>
+          <a:p>
+            <a:pPr algn="l" indent="0" marL="0">
+              <a:spcAft>
+                <a:spcPts val="800"/>
+              </a:spcAft>
+              <a:buNone/>
+            </a:pPr>
+            <a:r>
+              <a:rPr lang="en-US" sz="4000" b="1" dirty="0">
+                <a:solidFill>
+                  <a:srgbClr val="111111"/>
+                </a:solidFill>
+                <a:latin typeface="Times New Roman" pitchFamily="34" charset="0"/>
+                <a:ea typeface="Times New Roman" pitchFamily="34" charset="-122"/>
+                <a:cs typeface="Times New Roman" pitchFamily="34" charset="-120"/>
+              </a:rPr>
+              <a:t>Good behaviour: </a:t>
+            </a:r>
+            <a:pPr algn="l" indent="0" marL="0">
+              <a:spcAft>
+                <a:spcPts val="800"/>
+              </a:spcAft>
+              <a:buNone/>
+            </a:pPr>
+            <a:r>
+              <a:rPr lang="en-US" sz="4000" dirty="0">
+                <a:solidFill>
+                  <a:srgbClr val="111111"/>
+                </a:solidFill>
+                <a:latin typeface="Times New Roman" pitchFamily="34" charset="0"/>
+                <a:ea typeface="Times New Roman" pitchFamily="34" charset="-122"/>
+                <a:cs typeface="Times New Roman" pitchFamily="34" charset="-120"/>
+              </a:rPr>
+              <a:t>We stop burning rubbish and grass and remind others to keep the school clean.</a:t>
             </a:r>
             <a:endParaRPr lang="en-US" sz="4000" dirty="0"/>
           </a:p>
@@ -16231,7 +16872,7 @@
                 <a:ea typeface="Calibri" pitchFamily="34" charset="-122"/>
                 <a:cs typeface="Calibri" pitchFamily="34" charset="-120"/>
               </a:rPr>
-              <a:t>REMEDIATION</a:t>
+              <a:t>FORMATIVE EVALUATION</a:t>
             </a:r>
             <a:endParaRPr lang="en-US" sz="1400" dirty="0"/>
           </a:p>
@@ -16296,7 +16937,7 @@
                 <a:ea typeface="Times New Roman" pitchFamily="34" charset="-122"/>
                 <a:cs typeface="Times New Roman" pitchFamily="34" charset="-120"/>
               </a:rPr>
-              <a:t>Remediation</a:t>
+              <a:t>Evaluation 1</a:t>
             </a:r>
             <a:endParaRPr lang="en-US" sz="3600" dirty="0"/>
           </a:p>
@@ -16330,7 +16971,7 @@
               <a:buNone/>
             </a:pPr>
             <a:r>
-              <a:rPr lang="en-US" sz="4000" b="1" dirty="0">
+              <a:rPr lang="en-US" sz="4000" dirty="0">
                 <a:solidFill>
                   <a:srgbClr val="111111"/>
                 </a:solidFill>
@@ -16338,73 +16979,7 @@
                 <a:ea typeface="Times New Roman" pitchFamily="34" charset="-122"/>
                 <a:cs typeface="Times New Roman" pitchFamily="34" charset="-120"/>
               </a:rPr>
-              <a:t>Fill in the blanks:</a:t>
-            </a:r>
-            <a:endParaRPr lang="en-US" sz="4000" dirty="0"/>
-          </a:p>
-          <a:p>
-            <a:pPr algn="l" marL="342900" indent="-342900">
-              <a:spcAft>
-                <a:spcPts val="800"/>
-              </a:spcAft>
-              <a:buSzPct val="100000"/>
-              <a:buFont typeface="+mj-lt"/>
-              <a:buAutoNum type="arabicPeriod" startAt="1"/>
-            </a:pPr>
-            <a:r>
-              <a:rPr lang="en-US" sz="4000" dirty="0">
-                <a:solidFill>
-                  <a:srgbClr val="111111"/>
-                </a:solidFill>
-                <a:latin typeface="Times New Roman" pitchFamily="34" charset="0"/>
-                <a:ea typeface="Times New Roman" pitchFamily="34" charset="-122"/>
-                <a:cs typeface="Times New Roman" pitchFamily="34" charset="-120"/>
-              </a:rPr>
-              <a:t>Cutting trees is ______.</a:t>
-            </a:r>
-            <a:endParaRPr lang="en-US" sz="4000" dirty="0"/>
-          </a:p>
-          <a:p>
-            <a:pPr algn="l" marL="342900" indent="-342900">
-              <a:spcAft>
-                <a:spcPts val="800"/>
-              </a:spcAft>
-              <a:buSzPct val="100000"/>
-              <a:buFont typeface="+mj-lt"/>
-              <a:buAutoNum type="arabicPeriod" startAt="1"/>
-            </a:pPr>
-            <a:r>
-              <a:rPr lang="en-US" sz="4000" dirty="0">
-                <a:solidFill>
-                  <a:srgbClr val="111111"/>
-                </a:solidFill>
-                <a:latin typeface="Times New Roman" pitchFamily="34" charset="0"/>
-                <a:ea typeface="Times New Roman" pitchFamily="34" charset="-122"/>
-                <a:cs typeface="Times New Roman" pitchFamily="34" charset="-120"/>
-              </a:rPr>
-              <a:t>Rubbish on the ground is a form of ______.</a:t>
-            </a:r>
-            <a:endParaRPr lang="en-US" sz="4000" dirty="0"/>
-          </a:p>
-          <a:p>
-            <a:pPr algn="l" marL="342900" indent="-342900">
-              <a:spcAft>
-                <a:spcPts val="800"/>
-              </a:spcAft>
-              <a:buSzPct val="100000"/>
-              <a:buFont typeface="+mj-lt"/>
-              <a:buAutoNum type="arabicPeriod" startAt="1"/>
-            </a:pPr>
-            <a:r>
-              <a:rPr lang="en-US" sz="4000" dirty="0">
-                <a:solidFill>
-                  <a:srgbClr val="111111"/>
-                </a:solidFill>
-                <a:latin typeface="Times New Roman" pitchFamily="34" charset="0"/>
-                <a:ea typeface="Times New Roman" pitchFamily="34" charset="-122"/>
-                <a:cs typeface="Times New Roman" pitchFamily="34" charset="-120"/>
-              </a:rPr>
-              <a:t>Planting trees protects the ______.</a:t>
+              <a:t>Name two forms of degradation observed around the school.</a:t>
             </a:r>
             <a:endParaRPr lang="en-US" sz="4000" dirty="0"/>
           </a:p>
@@ -16516,7 +17091,7 @@
                 <a:ea typeface="Calibri" pitchFamily="34" charset="-122"/>
                 <a:cs typeface="Calibri" pitchFamily="34" charset="-120"/>
               </a:rPr>
-              <a:t>HOMEWORK</a:t>
+              <a:t>FORMATIVE EVALUATION</a:t>
             </a:r>
             <a:endParaRPr lang="en-US" sz="1400" dirty="0"/>
           </a:p>
@@ -16581,7 +17156,7 @@
                 <a:ea typeface="Times New Roman" pitchFamily="34" charset="-122"/>
                 <a:cs typeface="Times New Roman" pitchFamily="34" charset="-120"/>
               </a:rPr>
-              <a:t>Homework</a:t>
+              <a:t>Expected Answer</a:t>
             </a:r>
             <a:endParaRPr lang="en-US" sz="3600" dirty="0"/>
           </a:p>
@@ -16623,7 +17198,7 @@
                 <a:ea typeface="Times New Roman" pitchFamily="34" charset="-122"/>
                 <a:cs typeface="Times New Roman" pitchFamily="34" charset="-120"/>
               </a:rPr>
-              <a:t>Write a short report (five lines) on the damage you observed around the school and your solutions.</a:t>
+              <a:t>Rubbish on the ground and bare, eroded soil (also cut trees).</a:t>
             </a:r>
             <a:endParaRPr lang="en-US" sz="4000" dirty="0"/>
           </a:p>
@@ -16735,7 +17310,7 @@
                 <a:ea typeface="Calibri" pitchFamily="34" charset="-122"/>
                 <a:cs typeface="Calibri" pitchFamily="34" charset="-120"/>
               </a:rPr>
-              <a:t>NEXT LESSON</a:t>
+              <a:t>FORMATIVE EVALUATION</a:t>
             </a:r>
             <a:endParaRPr lang="en-US" sz="1400" dirty="0"/>
           </a:p>
@@ -16800,7 +17375,7 @@
                 <a:ea typeface="Times New Roman" pitchFamily="34" charset="-122"/>
                 <a:cs typeface="Times New Roman" pitchFamily="34" charset="-120"/>
               </a:rPr>
-              <a:t>Next Lesson</a:t>
+              <a:t>Evaluation 2</a:t>
             </a:r>
             <a:endParaRPr lang="en-US" sz="3600" dirty="0"/>
           </a:p>
@@ -16824,17 +17399,17 @@
           <a:ln/>
         </p:spPr>
         <p:txBody>
-          <a:bodyPr wrap="square" lIns="0" tIns="0" rIns="0" bIns="0" rtlCol="0" anchor="ctr"/>
-          <a:lstStyle/>
-          <a:p>
-            <a:pPr algn="ctr" indent="0" marL="0">
+          <a:bodyPr wrap="square" lIns="0" tIns="0" rIns="0" bIns="0" rtlCol="0" anchor="t"/>
+          <a:lstStyle/>
+          <a:p>
+            <a:pPr algn="l" indent="0" marL="0">
               <a:spcAft>
                 <a:spcPts val="800"/>
               </a:spcAft>
               <a:buNone/>
             </a:pPr>
             <a:r>
-              <a:rPr lang="en-US" sz="4000" b="1" dirty="0">
+              <a:rPr lang="en-US" sz="4000" dirty="0">
                 <a:solidFill>
                   <a:srgbClr val="111111"/>
                 </a:solidFill>
@@ -16842,27 +17417,7 @@
                 <a:ea typeface="Times New Roman" pitchFamily="34" charset="-122"/>
                 <a:cs typeface="Times New Roman" pitchFamily="34" charset="-120"/>
               </a:rPr>
-              <a:t>Our next lesson will be on:</a:t>
-            </a:r>
-            <a:endParaRPr lang="en-US" sz="4000" dirty="0"/>
-          </a:p>
-          <a:p>
-            <a:pPr algn="ctr" indent="0" marL="0">
-              <a:spcAft>
-                <a:spcPts val="800"/>
-              </a:spcAft>
-              <a:buNone/>
-            </a:pPr>
-            <a:r>
-              <a:rPr lang="en-US" sz="4000" b="1" dirty="0">
-                <a:solidFill>
-                  <a:srgbClr val="990011"/>
-                </a:solidFill>
-                <a:latin typeface="Times New Roman" pitchFamily="34" charset="0"/>
-                <a:ea typeface="Times New Roman" pitchFamily="34" charset="-122"/>
-                <a:cs typeface="Times New Roman" pitchFamily="34" charset="-120"/>
-              </a:rPr>
-              <a:t>Practical Work 5: Solid Waste Management</a:t>
+              <a:t>Propose two solutions.</a:t>
             </a:r>
             <a:endParaRPr lang="en-US" sz="4000" dirty="0"/>
           </a:p>
@@ -16974,6 +17529,1187 @@
                 <a:ea typeface="Calibri" pitchFamily="34" charset="-122"/>
                 <a:cs typeface="Calibri" pitchFamily="34" charset="-120"/>
               </a:rPr>
+              <a:t>FORMATIVE EVALUATION</a:t>
+            </a:r>
+            <a:endParaRPr lang="en-US" sz="1400" dirty="0"/>
+          </a:p>
+        </p:txBody>
+      </p:sp>
+      <p:pic>
+        <p:nvPicPr>
+          <p:cNvPr id="3" name="Image 0" descr="/home/claude/f4/img/minesec_sheet.png">    </p:cNvPr>
+          <p:cNvPicPr>
+            <a:picLocks noChangeAspect="1"/>
+          </p:cNvPicPr>
+          <p:nvPr/>
+        </p:nvPicPr>
+        <p:blipFill>
+          <a:blip r:embed="rId1"/>
+          <a:stretch>
+            <a:fillRect/>
+          </a:stretch>
+        </p:blipFill>
+        <p:spPr>
+          <a:xfrm>
+            <a:off x="0" y="658368"/>
+            <a:ext cx="5120640" cy="5833872"/>
+          </a:xfrm>
+          <a:prstGeom prst="rect">
+            <a:avLst/>
+          </a:prstGeom>
+        </p:spPr>
+      </p:pic>
+      <p:sp>
+        <p:nvSpPr>
+          <p:cNvPr id="4" name="Text 1"/>
+          <p:cNvSpPr/>
+          <p:nvPr/>
+        </p:nvSpPr>
+        <p:spPr>
+          <a:xfrm>
+            <a:off x="5349240" y="1005840"/>
+            <a:ext cx="6522415" cy="731520"/>
+          </a:xfrm>
+          <a:prstGeom prst="rect">
+            <a:avLst/>
+          </a:prstGeom>
+          <a:noFill/>
+          <a:ln/>
+        </p:spPr>
+        <p:txBody>
+          <a:bodyPr wrap="square" lIns="0" tIns="0" rIns="0" bIns="0" rtlCol="0" anchor="ctr">
+            <a:normAutofit/>
+          </a:bodyPr>
+          <a:lstStyle/>
+          <a:p>
+            <a:pPr algn="ctr" indent="0" marL="0">
+              <a:buNone/>
+            </a:pPr>
+            <a:r>
+              <a:rPr lang="en-US" sz="3600" b="1" dirty="0">
+                <a:solidFill>
+                  <a:srgbClr val="990011"/>
+                </a:solidFill>
+                <a:latin typeface="Times New Roman" pitchFamily="34" charset="0"/>
+                <a:ea typeface="Times New Roman" pitchFamily="34" charset="-122"/>
+                <a:cs typeface="Times New Roman" pitchFamily="34" charset="-120"/>
+              </a:rPr>
+              <a:t>Expected Answer</a:t>
+            </a:r>
+            <a:endParaRPr lang="en-US" sz="3600" dirty="0"/>
+          </a:p>
+        </p:txBody>
+      </p:sp>
+      <p:sp>
+        <p:nvSpPr>
+          <p:cNvPr id="5" name="Text 2"/>
+          <p:cNvSpPr/>
+          <p:nvPr/>
+        </p:nvSpPr>
+        <p:spPr>
+          <a:xfrm>
+            <a:off x="5349240" y="1783080"/>
+            <a:ext cx="6522415" cy="4663440"/>
+          </a:xfrm>
+          <a:prstGeom prst="rect">
+            <a:avLst/>
+          </a:prstGeom>
+          <a:noFill/>
+          <a:ln/>
+        </p:spPr>
+        <p:txBody>
+          <a:bodyPr wrap="square" lIns="0" tIns="0" rIns="0" bIns="0" rtlCol="0" anchor="t"/>
+          <a:lstStyle/>
+          <a:p>
+            <a:pPr algn="l" indent="0" marL="0">
+              <a:spcAft>
+                <a:spcPts val="800"/>
+              </a:spcAft>
+              <a:buNone/>
+            </a:pPr>
+            <a:r>
+              <a:rPr lang="en-US" sz="4000" dirty="0">
+                <a:solidFill>
+                  <a:srgbClr val="111111"/>
+                </a:solidFill>
+                <a:latin typeface="Times New Roman" pitchFamily="34" charset="0"/>
+                <a:ea typeface="Times New Roman" pitchFamily="34" charset="-122"/>
+                <a:cs typeface="Times New Roman" pitchFamily="34" charset="-120"/>
+              </a:rPr>
+              <a:t>Plant trees and put dustbins.</a:t>
+            </a:r>
+            <a:endParaRPr lang="en-US" sz="4000" dirty="0"/>
+          </a:p>
+        </p:txBody>
+      </p:sp>
+      <p:sp>
+        <p:nvSpPr>
+          <p:cNvPr id="25" name="Slide Number Placeholder 0"/>
+          <p:cNvSpPr>
+            <a:spLocks noGrp="1"/>
+          </p:cNvSpPr>
+          <p:nvPr>
+            <p:ph type="sldNum" sz="quarter" idx="4294967295"/>
+          </p:nvPr>
+        </p:nvSpPr>
+        <p:spPr>
+          <a:xfrm>
+            <a:off x="27432" y="91440"/>
+            <a:ext cx="585216" cy="475488"/>
+          </a:xfrm>
+          <a:prstGeom prst="rect">
+            <a:avLst/>
+          </a:prstGeom>
+          <a:extLst>
+            <a:ext uri="{C572A759-6A51-4108-AA02-DFA0A04FC94B}">
+              <ma14:wrappingTextBoxFlag xmlns:ma14="http://schemas.microsoft.com/office/mac/drawingml/2011/main" val="0"/>
+            </a:ext>
+          </a:extLst>
+        </p:spPr>
+        <p:txBody>
+          <a:bodyPr/>
+          <a:lstStyle>
+            <a:lvl1pPr>
+              <a:defRPr sz="2000">
+                <a:solidFill>
+                  <a:srgbClr val="FFFFFF"/>
+                </a:solidFill>
+                <a:latin typeface="Calibri"/>
+                <a:ea typeface="Calibri"/>
+                <a:cs typeface="Calibri"/>
+              </a:defRPr>
+            </a:lvl1pPr>
+          </a:lstStyle>
+          <a:p>
+            <a:pPr algn="ctr"/>
+            <a:fld id="{F7021451-1387-4CA6-816F-3879F97B5CBC}" type="slidenum">
+              <a:rPr b="1" lang="en-US"/>
+              <a:t>48</a:t>
+            </a:fld>
+            <a:endParaRPr lang="en-US"/>
+          </a:p>
+        </p:txBody>
+      </p:sp>
+    </p:spTree>
+  </p:cSld>
+  <p:clrMapOvr>
+    <a:masterClrMapping/>
+  </p:clrMapOvr>
+</p:sld>
+</file>
+
+<file path=ppt/slides/slide49.xml><?xml version="1.0" encoding="utf-8"?>
+<p:sld xmlns:a="http://schemas.openxmlformats.org/drawingml/2006/main" xmlns:r="http://schemas.openxmlformats.org/officeDocument/2006/relationships" xmlns:p="http://schemas.openxmlformats.org/presentationml/2006/main">
+  <p:cSld name="Slide 49">
+    <p:spTree>
+      <p:nvGrpSpPr>
+        <p:cNvPr id="1" name=""/>
+        <p:cNvGrpSpPr/>
+        <p:nvPr/>
+      </p:nvGrpSpPr>
+      <p:grpSpPr>
+        <a:xfrm>
+          <a:off x="0" y="0"/>
+          <a:ext cx="0" cy="0"/>
+          <a:chOff x="0" y="0"/>
+          <a:chExt cx="0" cy="0"/>
+        </a:xfrm>
+      </p:grpSpPr>
+      <p:sp>
+        <p:nvSpPr>
+          <p:cNvPr id="2" name="Text 0"/>
+          <p:cNvSpPr/>
+          <p:nvPr/>
+        </p:nvSpPr>
+        <p:spPr>
+          <a:xfrm>
+            <a:off x="457200" y="713232"/>
+            <a:ext cx="11368735" cy="274320"/>
+          </a:xfrm>
+          <a:prstGeom prst="rect">
+            <a:avLst/>
+          </a:prstGeom>
+          <a:noFill/>
+          <a:ln/>
+        </p:spPr>
+        <p:txBody>
+          <a:bodyPr wrap="square" lIns="0" tIns="0" rIns="0" bIns="0" rtlCol="0" anchor="ctr"/>
+          <a:lstStyle/>
+          <a:p>
+            <a:pPr algn="r" indent="0" marL="0">
+              <a:buNone/>
+            </a:pPr>
+            <a:r>
+              <a:rPr lang="en-US" sz="1400" b="1" dirty="0">
+                <a:solidFill>
+                  <a:srgbClr val="1C3F6E"/>
+                </a:solidFill>
+                <a:latin typeface="Calibri" pitchFamily="34" charset="0"/>
+                <a:ea typeface="Calibri" pitchFamily="34" charset="-122"/>
+                <a:cs typeface="Calibri" pitchFamily="34" charset="-120"/>
+              </a:rPr>
+              <a:t>REMEDIATION</a:t>
+            </a:r>
+            <a:endParaRPr lang="en-US" sz="1400" dirty="0"/>
+          </a:p>
+        </p:txBody>
+      </p:sp>
+      <p:pic>
+        <p:nvPicPr>
+          <p:cNvPr id="3" name="Image 0" descr="/home/claude/f4/img/minesec_sheet.png">    </p:cNvPr>
+          <p:cNvPicPr>
+            <a:picLocks noChangeAspect="1"/>
+          </p:cNvPicPr>
+          <p:nvPr/>
+        </p:nvPicPr>
+        <p:blipFill>
+          <a:blip r:embed="rId1"/>
+          <a:stretch>
+            <a:fillRect/>
+          </a:stretch>
+        </p:blipFill>
+        <p:spPr>
+          <a:xfrm>
+            <a:off x="0" y="658368"/>
+            <a:ext cx="5120640" cy="5833872"/>
+          </a:xfrm>
+          <a:prstGeom prst="rect">
+            <a:avLst/>
+          </a:prstGeom>
+        </p:spPr>
+      </p:pic>
+      <p:sp>
+        <p:nvSpPr>
+          <p:cNvPr id="4" name="Text 1"/>
+          <p:cNvSpPr/>
+          <p:nvPr/>
+        </p:nvSpPr>
+        <p:spPr>
+          <a:xfrm>
+            <a:off x="5349240" y="1005840"/>
+            <a:ext cx="6522415" cy="731520"/>
+          </a:xfrm>
+          <a:prstGeom prst="rect">
+            <a:avLst/>
+          </a:prstGeom>
+          <a:noFill/>
+          <a:ln/>
+        </p:spPr>
+        <p:txBody>
+          <a:bodyPr wrap="square" lIns="0" tIns="0" rIns="0" bIns="0" rtlCol="0" anchor="ctr">
+            <a:normAutofit/>
+          </a:bodyPr>
+          <a:lstStyle/>
+          <a:p>
+            <a:pPr algn="ctr" indent="0" marL="0">
+              <a:buNone/>
+            </a:pPr>
+            <a:r>
+              <a:rPr lang="en-US" sz="3600" b="1" dirty="0">
+                <a:solidFill>
+                  <a:srgbClr val="990011"/>
+                </a:solidFill>
+                <a:latin typeface="Times New Roman" pitchFamily="34" charset="0"/>
+                <a:ea typeface="Times New Roman" pitchFamily="34" charset="-122"/>
+                <a:cs typeface="Times New Roman" pitchFamily="34" charset="-120"/>
+              </a:rPr>
+              <a:t>Remediation</a:t>
+            </a:r>
+            <a:endParaRPr lang="en-US" sz="3600" dirty="0"/>
+          </a:p>
+        </p:txBody>
+      </p:sp>
+      <p:sp>
+        <p:nvSpPr>
+          <p:cNvPr id="5" name="Text 2"/>
+          <p:cNvSpPr/>
+          <p:nvPr/>
+        </p:nvSpPr>
+        <p:spPr>
+          <a:xfrm>
+            <a:off x="5349240" y="1783080"/>
+            <a:ext cx="6522415" cy="4663440"/>
+          </a:xfrm>
+          <a:prstGeom prst="rect">
+            <a:avLst/>
+          </a:prstGeom>
+          <a:noFill/>
+          <a:ln/>
+        </p:spPr>
+        <p:txBody>
+          <a:bodyPr wrap="square" lIns="0" tIns="0" rIns="0" bIns="0" rtlCol="0" anchor="t"/>
+          <a:lstStyle/>
+          <a:p>
+            <a:pPr algn="l" indent="0" marL="0">
+              <a:spcAft>
+                <a:spcPts val="800"/>
+              </a:spcAft>
+              <a:buNone/>
+            </a:pPr>
+            <a:r>
+              <a:rPr lang="en-US" sz="4000" b="1" dirty="0">
+                <a:solidFill>
+                  <a:srgbClr val="111111"/>
+                </a:solidFill>
+                <a:latin typeface="Times New Roman" pitchFamily="34" charset="0"/>
+                <a:ea typeface="Times New Roman" pitchFamily="34" charset="-122"/>
+                <a:cs typeface="Times New Roman" pitchFamily="34" charset="-120"/>
+              </a:rPr>
+              <a:t>Fill in the blanks:</a:t>
+            </a:r>
+            <a:endParaRPr lang="en-US" sz="4000" dirty="0"/>
+          </a:p>
+          <a:p>
+            <a:pPr algn="l" marL="342900" indent="-342900">
+              <a:spcAft>
+                <a:spcPts val="800"/>
+              </a:spcAft>
+              <a:buSzPct val="100000"/>
+              <a:buFont typeface="+mj-lt"/>
+              <a:buAutoNum type="arabicPeriod" startAt="1"/>
+            </a:pPr>
+            <a:r>
+              <a:rPr lang="en-US" sz="4000" dirty="0">
+                <a:solidFill>
+                  <a:srgbClr val="111111"/>
+                </a:solidFill>
+                <a:latin typeface="Times New Roman" pitchFamily="34" charset="0"/>
+                <a:ea typeface="Times New Roman" pitchFamily="34" charset="-122"/>
+                <a:cs typeface="Times New Roman" pitchFamily="34" charset="-120"/>
+              </a:rPr>
+              <a:t>Cutting trees is ______.</a:t>
+            </a:r>
+            <a:endParaRPr lang="en-US" sz="4000" dirty="0"/>
+          </a:p>
+          <a:p>
+            <a:pPr algn="l" marL="342900" indent="-342900">
+              <a:spcAft>
+                <a:spcPts val="800"/>
+              </a:spcAft>
+              <a:buSzPct val="100000"/>
+              <a:buFont typeface="+mj-lt"/>
+              <a:buAutoNum type="arabicPeriod" startAt="1"/>
+            </a:pPr>
+            <a:r>
+              <a:rPr lang="en-US" sz="4000" dirty="0">
+                <a:solidFill>
+                  <a:srgbClr val="111111"/>
+                </a:solidFill>
+                <a:latin typeface="Times New Roman" pitchFamily="34" charset="0"/>
+                <a:ea typeface="Times New Roman" pitchFamily="34" charset="-122"/>
+                <a:cs typeface="Times New Roman" pitchFamily="34" charset="-120"/>
+              </a:rPr>
+              <a:t>Rubbish on the ground is a form of ______.</a:t>
+            </a:r>
+            <a:endParaRPr lang="en-US" sz="4000" dirty="0"/>
+          </a:p>
+          <a:p>
+            <a:pPr algn="l" marL="342900" indent="-342900">
+              <a:spcAft>
+                <a:spcPts val="800"/>
+              </a:spcAft>
+              <a:buSzPct val="100000"/>
+              <a:buFont typeface="+mj-lt"/>
+              <a:buAutoNum type="arabicPeriod" startAt="1"/>
+            </a:pPr>
+            <a:r>
+              <a:rPr lang="en-US" sz="4000" dirty="0">
+                <a:solidFill>
+                  <a:srgbClr val="111111"/>
+                </a:solidFill>
+                <a:latin typeface="Times New Roman" pitchFamily="34" charset="0"/>
+                <a:ea typeface="Times New Roman" pitchFamily="34" charset="-122"/>
+                <a:cs typeface="Times New Roman" pitchFamily="34" charset="-120"/>
+              </a:rPr>
+              <a:t>Planting trees protects the ______.</a:t>
+            </a:r>
+            <a:endParaRPr lang="en-US" sz="4000" dirty="0"/>
+          </a:p>
+        </p:txBody>
+      </p:sp>
+      <p:sp>
+        <p:nvSpPr>
+          <p:cNvPr id="25" name="Slide Number Placeholder 0"/>
+          <p:cNvSpPr>
+            <a:spLocks noGrp="1"/>
+          </p:cNvSpPr>
+          <p:nvPr>
+            <p:ph type="sldNum" sz="quarter" idx="4294967295"/>
+          </p:nvPr>
+        </p:nvSpPr>
+        <p:spPr>
+          <a:xfrm>
+            <a:off x="27432" y="91440"/>
+            <a:ext cx="585216" cy="475488"/>
+          </a:xfrm>
+          <a:prstGeom prst="rect">
+            <a:avLst/>
+          </a:prstGeom>
+          <a:extLst>
+            <a:ext uri="{C572A759-6A51-4108-AA02-DFA0A04FC94B}">
+              <ma14:wrappingTextBoxFlag xmlns:ma14="http://schemas.microsoft.com/office/mac/drawingml/2011/main" val="0"/>
+            </a:ext>
+          </a:extLst>
+        </p:spPr>
+        <p:txBody>
+          <a:bodyPr/>
+          <a:lstStyle>
+            <a:lvl1pPr>
+              <a:defRPr sz="2000">
+                <a:solidFill>
+                  <a:srgbClr val="FFFFFF"/>
+                </a:solidFill>
+                <a:latin typeface="Calibri"/>
+                <a:ea typeface="Calibri"/>
+                <a:cs typeface="Calibri"/>
+              </a:defRPr>
+            </a:lvl1pPr>
+          </a:lstStyle>
+          <a:p>
+            <a:pPr algn="ctr"/>
+            <a:fld id="{F7021451-1387-4CA6-816F-3879F97B5CBC}" type="slidenum">
+              <a:rPr b="1" lang="en-US"/>
+              <a:t>49</a:t>
+            </a:fld>
+            <a:endParaRPr lang="en-US"/>
+          </a:p>
+        </p:txBody>
+      </p:sp>
+    </p:spTree>
+  </p:cSld>
+  <p:clrMapOvr>
+    <a:masterClrMapping/>
+  </p:clrMapOvr>
+</p:sld>
+</file>
+
+<file path=ppt/slides/slide5.xml><?xml version="1.0" encoding="utf-8"?>
+<p:sld xmlns:a="http://schemas.openxmlformats.org/drawingml/2006/main" xmlns:r="http://schemas.openxmlformats.org/officeDocument/2006/relationships" xmlns:p="http://schemas.openxmlformats.org/presentationml/2006/main">
+  <p:cSld name="Slide 5">
+    <p:spTree>
+      <p:nvGrpSpPr>
+        <p:cNvPr id="1" name=""/>
+        <p:cNvGrpSpPr/>
+        <p:nvPr/>
+      </p:nvGrpSpPr>
+      <p:grpSpPr>
+        <a:xfrm>
+          <a:off x="0" y="0"/>
+          <a:ext cx="0" cy="0"/>
+          <a:chOff x="0" y="0"/>
+          <a:chExt cx="0" cy="0"/>
+        </a:xfrm>
+      </p:grpSpPr>
+      <p:sp>
+        <p:nvSpPr>
+          <p:cNvPr id="2" name="Text 0"/>
+          <p:cNvSpPr/>
+          <p:nvPr/>
+        </p:nvSpPr>
+        <p:spPr>
+          <a:xfrm>
+            <a:off x="457200" y="713232"/>
+            <a:ext cx="11368735" cy="274320"/>
+          </a:xfrm>
+          <a:prstGeom prst="rect">
+            <a:avLst/>
+          </a:prstGeom>
+          <a:noFill/>
+          <a:ln/>
+        </p:spPr>
+        <p:txBody>
+          <a:bodyPr wrap="square" lIns="0" tIns="0" rIns="0" bIns="0" rtlCol="0" anchor="ctr"/>
+          <a:lstStyle/>
+          <a:p>
+            <a:pPr algn="r" indent="0" marL="0">
+              <a:buNone/>
+            </a:pPr>
+            <a:r>
+              <a:rPr lang="en-US" sz="1400" b="1" dirty="0">
+                <a:solidFill>
+                  <a:srgbClr val="1C3F6E"/>
+                </a:solidFill>
+                <a:latin typeface="Calibri" pitchFamily="34" charset="0"/>
+                <a:ea typeface="Calibri" pitchFamily="34" charset="-122"/>
+                <a:cs typeface="Calibri" pitchFamily="34" charset="-120"/>
+              </a:rPr>
+              <a:t>HOMEWORK CORRECTION</a:t>
+            </a:r>
+            <a:endParaRPr lang="en-US" sz="1400" dirty="0"/>
+          </a:p>
+        </p:txBody>
+      </p:sp>
+      <p:pic>
+        <p:nvPicPr>
+          <p:cNvPr id="3" name="Image 0" descr="/home/claude/f4/img/minesec_sheet.png">    </p:cNvPr>
+          <p:cNvPicPr>
+            <a:picLocks noChangeAspect="1"/>
+          </p:cNvPicPr>
+          <p:nvPr/>
+        </p:nvPicPr>
+        <p:blipFill>
+          <a:blip r:embed="rId1"/>
+          <a:stretch>
+            <a:fillRect/>
+          </a:stretch>
+        </p:blipFill>
+        <p:spPr>
+          <a:xfrm>
+            <a:off x="0" y="658368"/>
+            <a:ext cx="5120640" cy="5833872"/>
+          </a:xfrm>
+          <a:prstGeom prst="rect">
+            <a:avLst/>
+          </a:prstGeom>
+        </p:spPr>
+      </p:pic>
+      <p:sp>
+        <p:nvSpPr>
+          <p:cNvPr id="4" name="Text 1"/>
+          <p:cNvSpPr/>
+          <p:nvPr/>
+        </p:nvSpPr>
+        <p:spPr>
+          <a:xfrm>
+            <a:off x="5349240" y="1005840"/>
+            <a:ext cx="6522415" cy="731520"/>
+          </a:xfrm>
+          <a:prstGeom prst="rect">
+            <a:avLst/>
+          </a:prstGeom>
+          <a:noFill/>
+          <a:ln/>
+        </p:spPr>
+        <p:txBody>
+          <a:bodyPr wrap="square" lIns="0" tIns="0" rIns="0" bIns="0" rtlCol="0" anchor="ctr">
+            <a:normAutofit/>
+          </a:bodyPr>
+          <a:lstStyle/>
+          <a:p>
+            <a:pPr algn="ctr" indent="0" marL="0">
+              <a:buNone/>
+            </a:pPr>
+            <a:r>
+              <a:rPr lang="en-US" sz="3600" b="1" dirty="0">
+                <a:solidFill>
+                  <a:srgbClr val="990011"/>
+                </a:solidFill>
+                <a:latin typeface="Times New Roman" pitchFamily="34" charset="0"/>
+                <a:ea typeface="Times New Roman" pitchFamily="34" charset="-122"/>
+                <a:cs typeface="Times New Roman" pitchFamily="34" charset="-120"/>
+              </a:rPr>
+              <a:t>Correction: Possible Answer</a:t>
+            </a:r>
+            <a:endParaRPr lang="en-US" sz="3600" dirty="0"/>
+          </a:p>
+        </p:txBody>
+      </p:sp>
+      <p:sp>
+        <p:nvSpPr>
+          <p:cNvPr id="5" name="Text 2"/>
+          <p:cNvSpPr/>
+          <p:nvPr/>
+        </p:nvSpPr>
+        <p:spPr>
+          <a:xfrm>
+            <a:off x="5349240" y="1783080"/>
+            <a:ext cx="6522415" cy="4663440"/>
+          </a:xfrm>
+          <a:prstGeom prst="rect">
+            <a:avLst/>
+          </a:prstGeom>
+          <a:noFill/>
+          <a:ln/>
+        </p:spPr>
+        <p:txBody>
+          <a:bodyPr wrap="square" lIns="0" tIns="0" rIns="0" bIns="0" rtlCol="0" anchor="t"/>
+          <a:lstStyle/>
+          <a:p>
+            <a:pPr algn="l" indent="0" marL="0">
+              <a:spcAft>
+                <a:spcPts val="800"/>
+              </a:spcAft>
+              <a:buNone/>
+            </a:pPr>
+            <a:r>
+              <a:rPr lang="en-US" sz="4000" dirty="0">
+                <a:solidFill>
+                  <a:srgbClr val="111111"/>
+                </a:solidFill>
+                <a:latin typeface="Times New Roman" pitchFamily="34" charset="0"/>
+                <a:ea typeface="Times New Roman" pitchFamily="34" charset="-122"/>
+                <a:cs typeface="Times New Roman" pitchFamily="34" charset="-120"/>
+              </a:rPr>
+              <a:t>Examples: trees cut for firewood, bare soil with small gullies, plastic bags and rubbish thrown around, burnt grass.</a:t>
+            </a:r>
+            <a:endParaRPr lang="en-US" sz="4000" dirty="0"/>
+          </a:p>
+        </p:txBody>
+      </p:sp>
+      <p:sp>
+        <p:nvSpPr>
+          <p:cNvPr id="25" name="Slide Number Placeholder 0"/>
+          <p:cNvSpPr>
+            <a:spLocks noGrp="1"/>
+          </p:cNvSpPr>
+          <p:nvPr>
+            <p:ph type="sldNum" sz="quarter" idx="4294967295"/>
+          </p:nvPr>
+        </p:nvSpPr>
+        <p:spPr>
+          <a:xfrm>
+            <a:off x="27432" y="91440"/>
+            <a:ext cx="585216" cy="475488"/>
+          </a:xfrm>
+          <a:prstGeom prst="rect">
+            <a:avLst/>
+          </a:prstGeom>
+          <a:extLst>
+            <a:ext uri="{C572A759-6A51-4108-AA02-DFA0A04FC94B}">
+              <ma14:wrappingTextBoxFlag xmlns:ma14="http://schemas.microsoft.com/office/mac/drawingml/2011/main" val="0"/>
+            </a:ext>
+          </a:extLst>
+        </p:spPr>
+        <p:txBody>
+          <a:bodyPr/>
+          <a:lstStyle>
+            <a:lvl1pPr>
+              <a:defRPr sz="2000">
+                <a:solidFill>
+                  <a:srgbClr val="FFFFFF"/>
+                </a:solidFill>
+                <a:latin typeface="Calibri"/>
+                <a:ea typeface="Calibri"/>
+                <a:cs typeface="Calibri"/>
+              </a:defRPr>
+            </a:lvl1pPr>
+          </a:lstStyle>
+          <a:p>
+            <a:pPr algn="ctr"/>
+            <a:fld id="{F7021451-1387-4CA6-816F-3879F97B5CBC}" type="slidenum">
+              <a:rPr b="1" lang="en-US"/>
+              <a:t>5</a:t>
+            </a:fld>
+            <a:endParaRPr lang="en-US"/>
+          </a:p>
+        </p:txBody>
+      </p:sp>
+    </p:spTree>
+  </p:cSld>
+  <p:clrMapOvr>
+    <a:masterClrMapping/>
+  </p:clrMapOvr>
+</p:sld>
+</file>
+
+<file path=ppt/slides/slide50.xml><?xml version="1.0" encoding="utf-8"?>
+<p:sld xmlns:a="http://schemas.openxmlformats.org/drawingml/2006/main" xmlns:r="http://schemas.openxmlformats.org/officeDocument/2006/relationships" xmlns:p="http://schemas.openxmlformats.org/presentationml/2006/main">
+  <p:cSld name="Slide 50">
+    <p:spTree>
+      <p:nvGrpSpPr>
+        <p:cNvPr id="1" name=""/>
+        <p:cNvGrpSpPr/>
+        <p:nvPr/>
+      </p:nvGrpSpPr>
+      <p:grpSpPr>
+        <a:xfrm>
+          <a:off x="0" y="0"/>
+          <a:ext cx="0" cy="0"/>
+          <a:chOff x="0" y="0"/>
+          <a:chExt cx="0" cy="0"/>
+        </a:xfrm>
+      </p:grpSpPr>
+      <p:sp>
+        <p:nvSpPr>
+          <p:cNvPr id="2" name="Text 0"/>
+          <p:cNvSpPr/>
+          <p:nvPr/>
+        </p:nvSpPr>
+        <p:spPr>
+          <a:xfrm>
+            <a:off x="457200" y="713232"/>
+            <a:ext cx="11368735" cy="274320"/>
+          </a:xfrm>
+          <a:prstGeom prst="rect">
+            <a:avLst/>
+          </a:prstGeom>
+          <a:noFill/>
+          <a:ln/>
+        </p:spPr>
+        <p:txBody>
+          <a:bodyPr wrap="square" lIns="0" tIns="0" rIns="0" bIns="0" rtlCol="0" anchor="ctr"/>
+          <a:lstStyle/>
+          <a:p>
+            <a:pPr algn="r" indent="0" marL="0">
+              <a:buNone/>
+            </a:pPr>
+            <a:r>
+              <a:rPr lang="en-US" sz="1400" b="1" dirty="0">
+                <a:solidFill>
+                  <a:srgbClr val="1C3F6E"/>
+                </a:solidFill>
+                <a:latin typeface="Calibri" pitchFamily="34" charset="0"/>
+                <a:ea typeface="Calibri" pitchFamily="34" charset="-122"/>
+                <a:cs typeface="Calibri" pitchFamily="34" charset="-120"/>
+              </a:rPr>
+              <a:t>HOMEWORK</a:t>
+            </a:r>
+            <a:endParaRPr lang="en-US" sz="1400" dirty="0"/>
+          </a:p>
+        </p:txBody>
+      </p:sp>
+      <p:pic>
+        <p:nvPicPr>
+          <p:cNvPr id="3" name="Image 0" descr="/home/claude/f4/img/minesec_sheet.png">    </p:cNvPr>
+          <p:cNvPicPr>
+            <a:picLocks noChangeAspect="1"/>
+          </p:cNvPicPr>
+          <p:nvPr/>
+        </p:nvPicPr>
+        <p:blipFill>
+          <a:blip r:embed="rId1"/>
+          <a:stretch>
+            <a:fillRect/>
+          </a:stretch>
+        </p:blipFill>
+        <p:spPr>
+          <a:xfrm>
+            <a:off x="0" y="658368"/>
+            <a:ext cx="5120640" cy="5833872"/>
+          </a:xfrm>
+          <a:prstGeom prst="rect">
+            <a:avLst/>
+          </a:prstGeom>
+        </p:spPr>
+      </p:pic>
+      <p:sp>
+        <p:nvSpPr>
+          <p:cNvPr id="4" name="Text 1"/>
+          <p:cNvSpPr/>
+          <p:nvPr/>
+        </p:nvSpPr>
+        <p:spPr>
+          <a:xfrm>
+            <a:off x="5349240" y="1005840"/>
+            <a:ext cx="6522415" cy="731520"/>
+          </a:xfrm>
+          <a:prstGeom prst="rect">
+            <a:avLst/>
+          </a:prstGeom>
+          <a:noFill/>
+          <a:ln/>
+        </p:spPr>
+        <p:txBody>
+          <a:bodyPr wrap="square" lIns="0" tIns="0" rIns="0" bIns="0" rtlCol="0" anchor="ctr">
+            <a:normAutofit/>
+          </a:bodyPr>
+          <a:lstStyle/>
+          <a:p>
+            <a:pPr algn="ctr" indent="0" marL="0">
+              <a:buNone/>
+            </a:pPr>
+            <a:r>
+              <a:rPr lang="en-US" sz="3600" b="1" dirty="0">
+                <a:solidFill>
+                  <a:srgbClr val="990011"/>
+                </a:solidFill>
+                <a:latin typeface="Times New Roman" pitchFamily="34" charset="0"/>
+                <a:ea typeface="Times New Roman" pitchFamily="34" charset="-122"/>
+                <a:cs typeface="Times New Roman" pitchFamily="34" charset="-120"/>
+              </a:rPr>
+              <a:t>Homework</a:t>
+            </a:r>
+            <a:endParaRPr lang="en-US" sz="3600" dirty="0"/>
+          </a:p>
+        </p:txBody>
+      </p:sp>
+      <p:sp>
+        <p:nvSpPr>
+          <p:cNvPr id="5" name="Text 2"/>
+          <p:cNvSpPr/>
+          <p:nvPr/>
+        </p:nvSpPr>
+        <p:spPr>
+          <a:xfrm>
+            <a:off x="5349240" y="1783080"/>
+            <a:ext cx="6522415" cy="4663440"/>
+          </a:xfrm>
+          <a:prstGeom prst="rect">
+            <a:avLst/>
+          </a:prstGeom>
+          <a:noFill/>
+          <a:ln/>
+        </p:spPr>
+        <p:txBody>
+          <a:bodyPr wrap="square" lIns="0" tIns="0" rIns="0" bIns="0" rtlCol="0" anchor="t"/>
+          <a:lstStyle/>
+          <a:p>
+            <a:pPr algn="l" indent="0" marL="0">
+              <a:spcAft>
+                <a:spcPts val="800"/>
+              </a:spcAft>
+              <a:buNone/>
+            </a:pPr>
+            <a:r>
+              <a:rPr lang="en-US" sz="4000" dirty="0">
+                <a:solidFill>
+                  <a:srgbClr val="111111"/>
+                </a:solidFill>
+                <a:latin typeface="Times New Roman" pitchFamily="34" charset="0"/>
+                <a:ea typeface="Times New Roman" pitchFamily="34" charset="-122"/>
+                <a:cs typeface="Times New Roman" pitchFamily="34" charset="-120"/>
+              </a:rPr>
+              <a:t>Write a short report (five lines) on the damage you observed around the school and your solutions.</a:t>
+            </a:r>
+            <a:endParaRPr lang="en-US" sz="4000" dirty="0"/>
+          </a:p>
+        </p:txBody>
+      </p:sp>
+      <p:sp>
+        <p:nvSpPr>
+          <p:cNvPr id="25" name="Slide Number Placeholder 0"/>
+          <p:cNvSpPr>
+            <a:spLocks noGrp="1"/>
+          </p:cNvSpPr>
+          <p:nvPr>
+            <p:ph type="sldNum" sz="quarter" idx="4294967295"/>
+          </p:nvPr>
+        </p:nvSpPr>
+        <p:spPr>
+          <a:xfrm>
+            <a:off x="27432" y="91440"/>
+            <a:ext cx="585216" cy="475488"/>
+          </a:xfrm>
+          <a:prstGeom prst="rect">
+            <a:avLst/>
+          </a:prstGeom>
+          <a:extLst>
+            <a:ext uri="{C572A759-6A51-4108-AA02-DFA0A04FC94B}">
+              <ma14:wrappingTextBoxFlag xmlns:ma14="http://schemas.microsoft.com/office/mac/drawingml/2011/main" val="0"/>
+            </a:ext>
+          </a:extLst>
+        </p:spPr>
+        <p:txBody>
+          <a:bodyPr/>
+          <a:lstStyle>
+            <a:lvl1pPr>
+              <a:defRPr sz="2000">
+                <a:solidFill>
+                  <a:srgbClr val="FFFFFF"/>
+                </a:solidFill>
+                <a:latin typeface="Calibri"/>
+                <a:ea typeface="Calibri"/>
+                <a:cs typeface="Calibri"/>
+              </a:defRPr>
+            </a:lvl1pPr>
+          </a:lstStyle>
+          <a:p>
+            <a:pPr algn="ctr"/>
+            <a:fld id="{F7021451-1387-4CA6-816F-3879F97B5CBC}" type="slidenum">
+              <a:rPr b="1" lang="en-US"/>
+              <a:t>50</a:t>
+            </a:fld>
+            <a:endParaRPr lang="en-US"/>
+          </a:p>
+        </p:txBody>
+      </p:sp>
+    </p:spTree>
+  </p:cSld>
+  <p:clrMapOvr>
+    <a:masterClrMapping/>
+  </p:clrMapOvr>
+</p:sld>
+</file>
+
+<file path=ppt/slides/slide51.xml><?xml version="1.0" encoding="utf-8"?>
+<p:sld xmlns:a="http://schemas.openxmlformats.org/drawingml/2006/main" xmlns:r="http://schemas.openxmlformats.org/officeDocument/2006/relationships" xmlns:p="http://schemas.openxmlformats.org/presentationml/2006/main">
+  <p:cSld name="Slide 51">
+    <p:spTree>
+      <p:nvGrpSpPr>
+        <p:cNvPr id="1" name=""/>
+        <p:cNvGrpSpPr/>
+        <p:nvPr/>
+      </p:nvGrpSpPr>
+      <p:grpSpPr>
+        <a:xfrm>
+          <a:off x="0" y="0"/>
+          <a:ext cx="0" cy="0"/>
+          <a:chOff x="0" y="0"/>
+          <a:chExt cx="0" cy="0"/>
+        </a:xfrm>
+      </p:grpSpPr>
+      <p:sp>
+        <p:nvSpPr>
+          <p:cNvPr id="2" name="Text 0"/>
+          <p:cNvSpPr/>
+          <p:nvPr/>
+        </p:nvSpPr>
+        <p:spPr>
+          <a:xfrm>
+            <a:off x="457200" y="713232"/>
+            <a:ext cx="11368735" cy="274320"/>
+          </a:xfrm>
+          <a:prstGeom prst="rect">
+            <a:avLst/>
+          </a:prstGeom>
+          <a:noFill/>
+          <a:ln/>
+        </p:spPr>
+        <p:txBody>
+          <a:bodyPr wrap="square" lIns="0" tIns="0" rIns="0" bIns="0" rtlCol="0" anchor="ctr"/>
+          <a:lstStyle/>
+          <a:p>
+            <a:pPr algn="r" indent="0" marL="0">
+              <a:buNone/>
+            </a:pPr>
+            <a:r>
+              <a:rPr lang="en-US" sz="1400" b="1" dirty="0">
+                <a:solidFill>
+                  <a:srgbClr val="1C3F6E"/>
+                </a:solidFill>
+                <a:latin typeface="Calibri" pitchFamily="34" charset="0"/>
+                <a:ea typeface="Calibri" pitchFamily="34" charset="-122"/>
+                <a:cs typeface="Calibri" pitchFamily="34" charset="-120"/>
+              </a:rPr>
+              <a:t>NEXT LESSON</a:t>
+            </a:r>
+            <a:endParaRPr lang="en-US" sz="1400" dirty="0"/>
+          </a:p>
+        </p:txBody>
+      </p:sp>
+      <p:pic>
+        <p:nvPicPr>
+          <p:cNvPr id="3" name="Image 0" descr="/home/claude/f4/img/minesec_sheet.png">    </p:cNvPr>
+          <p:cNvPicPr>
+            <a:picLocks noChangeAspect="1"/>
+          </p:cNvPicPr>
+          <p:nvPr/>
+        </p:nvPicPr>
+        <p:blipFill>
+          <a:blip r:embed="rId1"/>
+          <a:stretch>
+            <a:fillRect/>
+          </a:stretch>
+        </p:blipFill>
+        <p:spPr>
+          <a:xfrm>
+            <a:off x="0" y="658368"/>
+            <a:ext cx="5120640" cy="5833872"/>
+          </a:xfrm>
+          <a:prstGeom prst="rect">
+            <a:avLst/>
+          </a:prstGeom>
+        </p:spPr>
+      </p:pic>
+      <p:sp>
+        <p:nvSpPr>
+          <p:cNvPr id="4" name="Text 1"/>
+          <p:cNvSpPr/>
+          <p:nvPr/>
+        </p:nvSpPr>
+        <p:spPr>
+          <a:xfrm>
+            <a:off x="5349240" y="1005840"/>
+            <a:ext cx="6522415" cy="731520"/>
+          </a:xfrm>
+          <a:prstGeom prst="rect">
+            <a:avLst/>
+          </a:prstGeom>
+          <a:noFill/>
+          <a:ln/>
+        </p:spPr>
+        <p:txBody>
+          <a:bodyPr wrap="square" lIns="0" tIns="0" rIns="0" bIns="0" rtlCol="0" anchor="ctr">
+            <a:normAutofit/>
+          </a:bodyPr>
+          <a:lstStyle/>
+          <a:p>
+            <a:pPr algn="ctr" indent="0" marL="0">
+              <a:buNone/>
+            </a:pPr>
+            <a:r>
+              <a:rPr lang="en-US" sz="3600" b="1" dirty="0">
+                <a:solidFill>
+                  <a:srgbClr val="990011"/>
+                </a:solidFill>
+                <a:latin typeface="Times New Roman" pitchFamily="34" charset="0"/>
+                <a:ea typeface="Times New Roman" pitchFamily="34" charset="-122"/>
+                <a:cs typeface="Times New Roman" pitchFamily="34" charset="-120"/>
+              </a:rPr>
+              <a:t>Next Lesson</a:t>
+            </a:r>
+            <a:endParaRPr lang="en-US" sz="3600" dirty="0"/>
+          </a:p>
+        </p:txBody>
+      </p:sp>
+      <p:sp>
+        <p:nvSpPr>
+          <p:cNvPr id="5" name="Text 2"/>
+          <p:cNvSpPr/>
+          <p:nvPr/>
+        </p:nvSpPr>
+        <p:spPr>
+          <a:xfrm>
+            <a:off x="5349240" y="1783080"/>
+            <a:ext cx="6522415" cy="4663440"/>
+          </a:xfrm>
+          <a:prstGeom prst="rect">
+            <a:avLst/>
+          </a:prstGeom>
+          <a:noFill/>
+          <a:ln/>
+        </p:spPr>
+        <p:txBody>
+          <a:bodyPr wrap="square" lIns="0" tIns="0" rIns="0" bIns="0" rtlCol="0" anchor="ctr"/>
+          <a:lstStyle/>
+          <a:p>
+            <a:pPr algn="ctr" indent="0" marL="0">
+              <a:spcAft>
+                <a:spcPts val="800"/>
+              </a:spcAft>
+              <a:buNone/>
+            </a:pPr>
+            <a:r>
+              <a:rPr lang="en-US" sz="4000" b="1" dirty="0">
+                <a:solidFill>
+                  <a:srgbClr val="111111"/>
+                </a:solidFill>
+                <a:latin typeface="Times New Roman" pitchFamily="34" charset="0"/>
+                <a:ea typeface="Times New Roman" pitchFamily="34" charset="-122"/>
+                <a:cs typeface="Times New Roman" pitchFamily="34" charset="-120"/>
+              </a:rPr>
+              <a:t>Our next lesson will be on:</a:t>
+            </a:r>
+            <a:endParaRPr lang="en-US" sz="4000" dirty="0"/>
+          </a:p>
+          <a:p>
+            <a:pPr algn="ctr" indent="0" marL="0">
+              <a:spcAft>
+                <a:spcPts val="800"/>
+              </a:spcAft>
+              <a:buNone/>
+            </a:pPr>
+            <a:r>
+              <a:rPr lang="en-US" sz="4000" b="1" dirty="0">
+                <a:solidFill>
+                  <a:srgbClr val="990011"/>
+                </a:solidFill>
+                <a:latin typeface="Times New Roman" pitchFamily="34" charset="0"/>
+                <a:ea typeface="Times New Roman" pitchFamily="34" charset="-122"/>
+                <a:cs typeface="Times New Roman" pitchFamily="34" charset="-120"/>
+              </a:rPr>
+              <a:t>Practical Work 5: Solid Waste Management</a:t>
+            </a:r>
+            <a:endParaRPr lang="en-US" sz="4000" dirty="0"/>
+          </a:p>
+        </p:txBody>
+      </p:sp>
+      <p:sp>
+        <p:nvSpPr>
+          <p:cNvPr id="25" name="Slide Number Placeholder 0"/>
+          <p:cNvSpPr>
+            <a:spLocks noGrp="1"/>
+          </p:cNvSpPr>
+          <p:nvPr>
+            <p:ph type="sldNum" sz="quarter" idx="4294967295"/>
+          </p:nvPr>
+        </p:nvSpPr>
+        <p:spPr>
+          <a:xfrm>
+            <a:off x="27432" y="91440"/>
+            <a:ext cx="585216" cy="475488"/>
+          </a:xfrm>
+          <a:prstGeom prst="rect">
+            <a:avLst/>
+          </a:prstGeom>
+          <a:extLst>
+            <a:ext uri="{C572A759-6A51-4108-AA02-DFA0A04FC94B}">
+              <ma14:wrappingTextBoxFlag xmlns:ma14="http://schemas.microsoft.com/office/mac/drawingml/2011/main" val="0"/>
+            </a:ext>
+          </a:extLst>
+        </p:spPr>
+        <p:txBody>
+          <a:bodyPr/>
+          <a:lstStyle>
+            <a:lvl1pPr>
+              <a:defRPr sz="2000">
+                <a:solidFill>
+                  <a:srgbClr val="FFFFFF"/>
+                </a:solidFill>
+                <a:latin typeface="Calibri"/>
+                <a:ea typeface="Calibri"/>
+                <a:cs typeface="Calibri"/>
+              </a:defRPr>
+            </a:lvl1pPr>
+          </a:lstStyle>
+          <a:p>
+            <a:pPr algn="ctr"/>
+            <a:fld id="{F7021451-1387-4CA6-816F-3879F97B5CBC}" type="slidenum">
+              <a:rPr b="1" lang="en-US"/>
+              <a:t>51</a:t>
+            </a:fld>
+            <a:endParaRPr lang="en-US"/>
+          </a:p>
+        </p:txBody>
+      </p:sp>
+    </p:spTree>
+  </p:cSld>
+  <p:clrMapOvr>
+    <a:masterClrMapping/>
+  </p:clrMapOvr>
+</p:sld>
+</file>
+
+<file path=ppt/slides/slide52.xml><?xml version="1.0" encoding="utf-8"?>
+<p:sld xmlns:a="http://schemas.openxmlformats.org/drawingml/2006/main" xmlns:r="http://schemas.openxmlformats.org/officeDocument/2006/relationships" xmlns:p="http://schemas.openxmlformats.org/presentationml/2006/main">
+  <p:cSld name="Slide 52">
+    <p:spTree>
+      <p:nvGrpSpPr>
+        <p:cNvPr id="1" name=""/>
+        <p:cNvGrpSpPr/>
+        <p:nvPr/>
+      </p:nvGrpSpPr>
+      <p:grpSpPr>
+        <a:xfrm>
+          <a:off x="0" y="0"/>
+          <a:ext cx="0" cy="0"/>
+          <a:chOff x="0" y="0"/>
+          <a:chExt cx="0" cy="0"/>
+        </a:xfrm>
+      </p:grpSpPr>
+      <p:sp>
+        <p:nvSpPr>
+          <p:cNvPr id="2" name="Text 0"/>
+          <p:cNvSpPr/>
+          <p:nvPr/>
+        </p:nvSpPr>
+        <p:spPr>
+          <a:xfrm>
+            <a:off x="457200" y="713232"/>
+            <a:ext cx="11368735" cy="274320"/>
+          </a:xfrm>
+          <a:prstGeom prst="rect">
+            <a:avLst/>
+          </a:prstGeom>
+          <a:noFill/>
+          <a:ln/>
+        </p:spPr>
+        <p:txBody>
+          <a:bodyPr wrap="square" lIns="0" tIns="0" rIns="0" bIns="0" rtlCol="0" anchor="ctr"/>
+          <a:lstStyle/>
+          <a:p>
+            <a:pPr algn="r" indent="0" marL="0">
+              <a:buNone/>
+            </a:pPr>
+            <a:r>
+              <a:rPr lang="en-US" sz="1400" b="1" dirty="0">
+                <a:solidFill>
+                  <a:srgbClr val="1C3F6E"/>
+                </a:solidFill>
+                <a:latin typeface="Calibri" pitchFamily="34" charset="0"/>
+                <a:ea typeface="Calibri" pitchFamily="34" charset="-122"/>
+                <a:cs typeface="Calibri" pitchFamily="34" charset="-120"/>
+              </a:rPr>
               <a:t>BILINGUAL GAME</a:t>
             </a:r>
             <a:endParaRPr lang="en-US" sz="1400" dirty="0"/>
@@ -17021,7 +18757,7 @@
       </p:sp>
       <p:graphicFrame>
         <p:nvGraphicFramePr>
-          <p:cNvPr id="49" name="Table 0"/>
+          <p:cNvPr id="53" name="Table 0"/>
           <p:cNvGraphicFramePr>
             <a:graphicFrameLocks noGrp="1"/>
           </p:cNvGraphicFramePr>
@@ -18057,7 +19793,7 @@
             <a:pPr algn="ctr"/>
             <a:fld id="{F7021451-1387-4CA6-816F-3879F97B5CBC}" type="slidenum">
               <a:rPr b="1" lang="en-US"/>
-              <a:t>48</a:t>
+              <a:t>52</a:t>
             </a:fld>
             <a:endParaRPr lang="en-US"/>
           </a:p>
@@ -18071,9 +19807,9 @@
 </p:sld>
 </file>
 
-<file path=ppt/slides/slide49.xml><?xml version="1.0" encoding="utf-8"?>
+<file path=ppt/slides/slide53.xml><?xml version="1.0" encoding="utf-8"?>
 <p:sld xmlns:a="http://schemas.openxmlformats.org/drawingml/2006/main" xmlns:r="http://schemas.openxmlformats.org/officeDocument/2006/relationships" xmlns:p="http://schemas.openxmlformats.org/presentationml/2006/main">
-  <p:cSld name="Slide 49">
+  <p:cSld name="Slide 53">
     <p:spTree>
       <p:nvGrpSpPr>
         <p:cNvPr id="1" name=""/>
@@ -18168,7 +19904,7 @@
       </p:sp>
       <p:graphicFrame>
         <p:nvGraphicFramePr>
-          <p:cNvPr id="50" name="Table 0"/>
+          <p:cNvPr id="54" name="Table 0"/>
           <p:cNvGraphicFramePr>
             <a:graphicFrameLocks noGrp="1"/>
           </p:cNvGraphicFramePr>
@@ -18790,7 +20526,7 @@
             <a:pPr algn="ctr"/>
             <a:fld id="{F7021451-1387-4CA6-816F-3879F97B5CBC}" type="slidenum">
               <a:rPr b="1" lang="en-US"/>
-              <a:t>49</a:t>
+              <a:t>53</a:t>
             </a:fld>
             <a:endParaRPr lang="en-US"/>
           </a:p>
@@ -18804,9 +20540,9 @@
 </p:sld>
 </file>
 
-<file path=ppt/slides/slide5.xml><?xml version="1.0" encoding="utf-8"?>
+<file path=ppt/slides/slide54.xml><?xml version="1.0" encoding="utf-8"?>
 <p:sld xmlns:a="http://schemas.openxmlformats.org/drawingml/2006/main" xmlns:r="http://schemas.openxmlformats.org/officeDocument/2006/relationships" xmlns:p="http://schemas.openxmlformats.org/presentationml/2006/main">
-  <p:cSld name="Slide 5">
+  <p:cSld name="Slide 54">
     <p:spTree>
       <p:nvGrpSpPr>
         <p:cNvPr id="1" name=""/>
@@ -18854,225 +20590,6 @@
                 <a:ea typeface="Calibri" pitchFamily="34" charset="-122"/>
                 <a:cs typeface="Calibri" pitchFamily="34" charset="-120"/>
               </a:rPr>
-              <a:t>HOMEWORK CORRECTION</a:t>
-            </a:r>
-            <a:endParaRPr lang="en-US" sz="1400" dirty="0"/>
-          </a:p>
-        </p:txBody>
-      </p:sp>
-      <p:pic>
-        <p:nvPicPr>
-          <p:cNvPr id="3" name="Image 0" descr="/home/claude/f4/img/minesec_sheet.png">    </p:cNvPr>
-          <p:cNvPicPr>
-            <a:picLocks noChangeAspect="1"/>
-          </p:cNvPicPr>
-          <p:nvPr/>
-        </p:nvPicPr>
-        <p:blipFill>
-          <a:blip r:embed="rId1"/>
-          <a:stretch>
-            <a:fillRect/>
-          </a:stretch>
-        </p:blipFill>
-        <p:spPr>
-          <a:xfrm>
-            <a:off x="0" y="658368"/>
-            <a:ext cx="5120640" cy="5833872"/>
-          </a:xfrm>
-          <a:prstGeom prst="rect">
-            <a:avLst/>
-          </a:prstGeom>
-        </p:spPr>
-      </p:pic>
-      <p:sp>
-        <p:nvSpPr>
-          <p:cNvPr id="4" name="Text 1"/>
-          <p:cNvSpPr/>
-          <p:nvPr/>
-        </p:nvSpPr>
-        <p:spPr>
-          <a:xfrm>
-            <a:off x="5349240" y="1005840"/>
-            <a:ext cx="6522415" cy="731520"/>
-          </a:xfrm>
-          <a:prstGeom prst="rect">
-            <a:avLst/>
-          </a:prstGeom>
-          <a:noFill/>
-          <a:ln/>
-        </p:spPr>
-        <p:txBody>
-          <a:bodyPr wrap="square" lIns="0" tIns="0" rIns="0" bIns="0" rtlCol="0" anchor="ctr">
-            <a:normAutofit/>
-          </a:bodyPr>
-          <a:lstStyle/>
-          <a:p>
-            <a:pPr algn="ctr" indent="0" marL="0">
-              <a:buNone/>
-            </a:pPr>
-            <a:r>
-              <a:rPr lang="en-US" sz="3600" b="1" dirty="0">
-                <a:solidFill>
-                  <a:srgbClr val="990011"/>
-                </a:solidFill>
-                <a:latin typeface="Times New Roman" pitchFamily="34" charset="0"/>
-                <a:ea typeface="Times New Roman" pitchFamily="34" charset="-122"/>
-                <a:cs typeface="Times New Roman" pitchFamily="34" charset="-120"/>
-              </a:rPr>
-              <a:t>Correction: Possible Answer</a:t>
-            </a:r>
-            <a:endParaRPr lang="en-US" sz="3600" dirty="0"/>
-          </a:p>
-        </p:txBody>
-      </p:sp>
-      <p:sp>
-        <p:nvSpPr>
-          <p:cNvPr id="5" name="Text 2"/>
-          <p:cNvSpPr/>
-          <p:nvPr/>
-        </p:nvSpPr>
-        <p:spPr>
-          <a:xfrm>
-            <a:off x="5349240" y="1783080"/>
-            <a:ext cx="6522415" cy="4663440"/>
-          </a:xfrm>
-          <a:prstGeom prst="rect">
-            <a:avLst/>
-          </a:prstGeom>
-          <a:noFill/>
-          <a:ln/>
-        </p:spPr>
-        <p:txBody>
-          <a:bodyPr wrap="square" lIns="0" tIns="0" rIns="0" bIns="0" rtlCol="0" anchor="t"/>
-          <a:lstStyle/>
-          <a:p>
-            <a:pPr algn="l" indent="0" marL="0">
-              <a:spcAft>
-                <a:spcPts val="800"/>
-              </a:spcAft>
-              <a:buNone/>
-            </a:pPr>
-            <a:r>
-              <a:rPr lang="en-US" sz="4000" dirty="0">
-                <a:solidFill>
-                  <a:srgbClr val="111111"/>
-                </a:solidFill>
-                <a:latin typeface="Times New Roman" pitchFamily="34" charset="0"/>
-                <a:ea typeface="Times New Roman" pitchFamily="34" charset="-122"/>
-                <a:cs typeface="Times New Roman" pitchFamily="34" charset="-120"/>
-              </a:rPr>
-              <a:t>Examples: trees cut for firewood, bare soil with small gullies, plastic bags and rubbish thrown around, burnt grass.</a:t>
-            </a:r>
-            <a:endParaRPr lang="en-US" sz="4000" dirty="0"/>
-          </a:p>
-        </p:txBody>
-      </p:sp>
-      <p:sp>
-        <p:nvSpPr>
-          <p:cNvPr id="25" name="Slide Number Placeholder 0"/>
-          <p:cNvSpPr>
-            <a:spLocks noGrp="1"/>
-          </p:cNvSpPr>
-          <p:nvPr>
-            <p:ph type="sldNum" sz="quarter" idx="4294967295"/>
-          </p:nvPr>
-        </p:nvSpPr>
-        <p:spPr>
-          <a:xfrm>
-            <a:off x="27432" y="91440"/>
-            <a:ext cx="585216" cy="475488"/>
-          </a:xfrm>
-          <a:prstGeom prst="rect">
-            <a:avLst/>
-          </a:prstGeom>
-          <a:extLst>
-            <a:ext uri="{C572A759-6A51-4108-AA02-DFA0A04FC94B}">
-              <ma14:wrappingTextBoxFlag xmlns:ma14="http://schemas.microsoft.com/office/mac/drawingml/2011/main" val="0"/>
-            </a:ext>
-          </a:extLst>
-        </p:spPr>
-        <p:txBody>
-          <a:bodyPr/>
-          <a:lstStyle>
-            <a:lvl1pPr>
-              <a:defRPr sz="2000">
-                <a:solidFill>
-                  <a:srgbClr val="FFFFFF"/>
-                </a:solidFill>
-                <a:latin typeface="Calibri"/>
-                <a:ea typeface="Calibri"/>
-                <a:cs typeface="Calibri"/>
-              </a:defRPr>
-            </a:lvl1pPr>
-          </a:lstStyle>
-          <a:p>
-            <a:pPr algn="ctr"/>
-            <a:fld id="{F7021451-1387-4CA6-816F-3879F97B5CBC}" type="slidenum">
-              <a:rPr b="1" lang="en-US"/>
-              <a:t>5</a:t>
-            </a:fld>
-            <a:endParaRPr lang="en-US"/>
-          </a:p>
-        </p:txBody>
-      </p:sp>
-    </p:spTree>
-  </p:cSld>
-  <p:clrMapOvr>
-    <a:masterClrMapping/>
-  </p:clrMapOvr>
-</p:sld>
-</file>
-
-<file path=ppt/slides/slide50.xml><?xml version="1.0" encoding="utf-8"?>
-<p:sld xmlns:a="http://schemas.openxmlformats.org/drawingml/2006/main" xmlns:r="http://schemas.openxmlformats.org/officeDocument/2006/relationships" xmlns:p="http://schemas.openxmlformats.org/presentationml/2006/main">
-  <p:cSld name="Slide 50">
-    <p:spTree>
-      <p:nvGrpSpPr>
-        <p:cNvPr id="1" name=""/>
-        <p:cNvGrpSpPr/>
-        <p:nvPr/>
-      </p:nvGrpSpPr>
-      <p:grpSpPr>
-        <a:xfrm>
-          <a:off x="0" y="0"/>
-          <a:ext cx="0" cy="0"/>
-          <a:chOff x="0" y="0"/>
-          <a:chExt cx="0" cy="0"/>
-        </a:xfrm>
-      </p:grpSpPr>
-      <p:sp>
-        <p:nvSpPr>
-          <p:cNvPr id="2" name="Text 0"/>
-          <p:cNvSpPr/>
-          <p:nvPr/>
-        </p:nvSpPr>
-        <p:spPr>
-          <a:xfrm>
-            <a:off x="457200" y="713232"/>
-            <a:ext cx="11368735" cy="274320"/>
-          </a:xfrm>
-          <a:prstGeom prst="rect">
-            <a:avLst/>
-          </a:prstGeom>
-          <a:noFill/>
-          <a:ln/>
-        </p:spPr>
-        <p:txBody>
-          <a:bodyPr wrap="square" lIns="0" tIns="0" rIns="0" bIns="0" rtlCol="0" anchor="ctr"/>
-          <a:lstStyle/>
-          <a:p>
-            <a:pPr algn="r" indent="0" marL="0">
-              <a:buNone/>
-            </a:pPr>
-            <a:r>
-              <a:rPr lang="en-US" sz="1400" b="1" dirty="0">
-                <a:solidFill>
-                  <a:srgbClr val="1C3F6E"/>
-                </a:solidFill>
-                <a:latin typeface="Calibri" pitchFamily="34" charset="0"/>
-                <a:ea typeface="Calibri" pitchFamily="34" charset="-122"/>
-                <a:cs typeface="Calibri" pitchFamily="34" charset="-120"/>
-              </a:rPr>
               <a:t>LOGBOOK</a:t>
             </a:r>
             <a:endParaRPr lang="en-US" sz="1400" dirty="0"/>
@@ -19120,7 +20637,7 @@
       </p:sp>
       <p:graphicFrame>
         <p:nvGraphicFramePr>
-          <p:cNvPr id="51" name="Table 0"/>
+          <p:cNvPr id="55" name="Table 0"/>
           <p:cNvGraphicFramePr>
             <a:graphicFrameLocks noGrp="1"/>
           </p:cNvGraphicFramePr>
@@ -19230,7 +20747,7 @@
                           <a:ea typeface="Calibri" pitchFamily="34" charset="-122"/>
                           <a:cs typeface="Calibri" pitchFamily="34" charset="-120"/>
                         </a:rPr>
-                        <a:t>Theoretical Basis; Method of the Field Visit; Solutions for the School.</a:t>
+                        <a:t>DEFINITIONS; Types of Human Aggression on the Environment; Method of the Field Visit; Solutions for the School.</a:t>
                       </a:r>
                       <a:endParaRPr lang="en-US" sz="1600" dirty="0">
                         <a:latin typeface="Calibri" charset="0"/>
@@ -19880,7 +21397,7 @@
             <a:pPr algn="ctr"/>
             <a:fld id="{F7021451-1387-4CA6-816F-3879F97B5CBC}" type="slidenum">
               <a:rPr b="1" lang="en-US"/>
-              <a:t>50</a:t>
+              <a:t>54</a:t>
             </a:fld>
             <a:endParaRPr lang="en-US"/>
           </a:p>
@@ -19894,9 +21411,9 @@
 </p:sld>
 </file>
 
-<file path=ppt/slides/slide51.xml><?xml version="1.0" encoding="utf-8"?>
+<file path=ppt/slides/slide55.xml><?xml version="1.0" encoding="utf-8"?>
 <p:sld xmlns:a="http://schemas.openxmlformats.org/drawingml/2006/main" xmlns:r="http://schemas.openxmlformats.org/officeDocument/2006/relationships" xmlns:p="http://schemas.openxmlformats.org/presentationml/2006/main">
-  <p:cSld name="Slide 51">
+  <p:cSld name="Slide 55">
     <p:spTree>
       <p:nvGrpSpPr>
         <p:cNvPr id="1" name=""/>
@@ -20073,7 +21590,7 @@
                 <a:ea typeface="Calibri" pitchFamily="34" charset="-122"/>
                 <a:cs typeface="Calibri" pitchFamily="34" charset="-120"/>
               </a:rPr>
-              <a:t>Without the projector (Activity 1): list them on the board.</a:t>
+              <a:t>Without the projector (Activity 1): list the types of damage on the board.</a:t>
             </a:r>
             <a:endParaRPr lang="en-US" sz="2000" dirty="0"/>
           </a:p>
@@ -20205,7 +21722,7 @@
             <a:pPr algn="ctr"/>
             <a:fld id="{F7021451-1387-4CA6-816F-3879F97B5CBC}" type="slidenum">
               <a:rPr b="1" lang="en-US"/>
-              <a:t>51</a:t>
+              <a:t>55</a:t>
             </a:fld>
             <a:endParaRPr lang="en-US"/>
           </a:p>
@@ -20219,9 +21736,9 @@
 </p:sld>
 </file>
 
-<file path=ppt/slides/slide52.xml><?xml version="1.0" encoding="utf-8"?>
+<file path=ppt/slides/slide56.xml><?xml version="1.0" encoding="utf-8"?>
 <p:sld xmlns:a="http://schemas.openxmlformats.org/drawingml/2006/main" xmlns:r="http://schemas.openxmlformats.org/officeDocument/2006/relationships" xmlns:p="http://schemas.openxmlformats.org/presentationml/2006/main">
-  <p:cSld name="Slide 52">
+  <p:cSld name="Slide 56">
     <p:spTree>
       <p:nvGrpSpPr>
         <p:cNvPr id="1" name=""/>
@@ -20551,7 +22068,7 @@
             <a:pPr algn="ctr"/>
             <a:fld id="{F7021451-1387-4CA6-816F-3879F97B5CBC}" type="slidenum">
               <a:rPr b="1" lang="en-US"/>
-              <a:t>52</a:t>
+              <a:t>56</a:t>
             </a:fld>
             <a:endParaRPr lang="en-US"/>
           </a:p>

--- a/lecons/F1/11_F1_M2_GW01_Degradation_of_the_Natural_Environment_of_the_School.pptx
+++ b/lecons/F1/11_F1_M2_GW01_Degradation_of_the_Natural_Environment_of_the_School.pptx
@@ -13612,7 +13612,7 @@
         <p:spPr>
           <a:xfrm>
             <a:off x="0" y="658368"/>
-            <a:ext cx="3840480" cy="5833872"/>
+            <a:ext cx="5120640" cy="5833872"/>
           </a:xfrm>
           <a:prstGeom prst="rect">
             <a:avLst/>
@@ -13627,8 +13627,8 @@
         </p:nvSpPr>
         <p:spPr>
           <a:xfrm>
-            <a:off x="4069080" y="1005840"/>
-            <a:ext cx="7802575" cy="731520"/>
+            <a:off x="5349240" y="1005840"/>
+            <a:ext cx="6522415" cy="731520"/>
           </a:xfrm>
           <a:prstGeom prst="rect">
             <a:avLst/>
@@ -13668,8 +13668,8 @@
         </p:nvSpPr>
         <p:spPr>
           <a:xfrm>
-            <a:off x="4069080" y="1783080"/>
-            <a:ext cx="7802575" cy="4663440"/>
+            <a:off x="5349240" y="1783080"/>
+            <a:ext cx="6522415" cy="4663440"/>
           </a:xfrm>
           <a:prstGeom prst="rect">
             <a:avLst/>
@@ -13688,7 +13688,7 @@
               <a:buNone/>
             </a:pPr>
             <a:r>
-              <a:rPr lang="en-US" sz="4000" b="1" dirty="0">
+              <a:rPr lang="en-US" sz="3200" b="1" dirty="0">
                 <a:solidFill>
                   <a:srgbClr val="111111"/>
                 </a:solidFill>
@@ -13698,7 +13698,7 @@
               </a:rPr>
               <a:t>Topic: Let's Preserve our Environment</a:t>
             </a:r>
-            <a:endParaRPr lang="en-US" sz="4000" dirty="0"/>
+            <a:endParaRPr lang="en-US" sz="3200" dirty="0"/>
           </a:p>
           <a:p>
             <a:pPr algn="l" indent="0" marL="0">
@@ -13708,7 +13708,7 @@
               <a:buNone/>
             </a:pPr>
             <a:r>
-              <a:rPr lang="en-US" sz="4000" b="1" dirty="0">
+              <a:rPr lang="en-US" sz="3200" b="1" dirty="0">
                 <a:solidFill>
                   <a:srgbClr val="111111"/>
                 </a:solidFill>
@@ -13718,7 +13718,7 @@
               </a:rPr>
               <a:t>Sub-topic: Natural Regions (Bio-climatic Zones) and their Degradation</a:t>
             </a:r>
-            <a:endParaRPr lang="en-US" sz="4000" dirty="0"/>
+            <a:endParaRPr lang="en-US" sz="3200" dirty="0"/>
           </a:p>
           <a:p>
             <a:pPr algn="l" indent="0" marL="0">
@@ -13728,7 +13728,7 @@
               <a:buNone/>
             </a:pPr>
             <a:r>
-              <a:rPr lang="en-US" sz="4000" b="1" dirty="0">
+              <a:rPr lang="en-US" sz="3200" b="1" dirty="0">
                 <a:solidFill>
                   <a:srgbClr val="990011"/>
                 </a:solidFill>
@@ -13738,7 +13738,7 @@
               </a:rPr>
               <a:t>Guided Work 1: Degradation of the Natural Environment of the School</a:t>
             </a:r>
-            <a:endParaRPr lang="en-US" sz="4000" dirty="0"/>
+            <a:endParaRPr lang="en-US" sz="3200" dirty="0"/>
           </a:p>
         </p:txBody>
       </p:sp>

--- a/lecons/F1/11_F1_M2_GW01_Degradation_of_the_Natural_Environment_of_the_School.pptx
+++ b/lecons/F1/11_F1_M2_GW01_Degradation_of_the_Natural_Environment_of_the_School.pptx
@@ -3461,7 +3461,7 @@
           <a:p>
             <a:r>
               <a:rPr lang="en-US" dirty="0"/>
-              <a:t>Before we start the new lesson, let us correct the homework I gave you at the end of Lesson 6: Forms of Degradation of the Natural Regions of Cameroon. The question was: Observe your school surroundings and write two examples of damage to the environment. Take out your exercise books.</a:t>
+              <a:t>Before we start the new lesson, let us correct the homework I gave you at the end of Lesson 6: Forms of Degradation of the Natural Regions of Cameroon. The question was: Give two forms of damage to the environment of a school. Take out your exercise books.</a:t>
             </a:r>
             <a:endParaRPr lang="en-US" dirty="0"/>
           </a:p>
@@ -4429,7 +4429,7 @@
           <a:p>
             <a:r>
               <a:rPr lang="en-US" dirty="0"/>
-              <a:t>Here is a good answer. Examples: trees cut for firewood, bare soil with small gullies, plastic bags and rubbish thrown around, burnt grass. Compare it with your own answer and correct your work in red.</a:t>
+              <a:t>Here is a good answer. Waste on the ground and cut trees (also soil erosion). Compare it with your own answer and correct your work in red.</a:t>
             </a:r>
             <a:endParaRPr lang="en-US" dirty="0"/>
           </a:p>
@@ -4517,7 +4517,7 @@
           <a:p>
             <a:r>
               <a:rPr lang="en-US" dirty="0"/>
-              <a:t>For your homework: Write a short report (five lines) on the damage you observed around the school and your solutions. We shall correct it at the beginning of our next lesson.</a:t>
+              <a:t>For your homework: Name the two types of solid waste. We shall correct it at the beginning of our next lesson.</a:t>
             </a:r>
             <a:endParaRPr lang="en-US" dirty="0"/>
           </a:p>
@@ -15351,7 +15351,7 @@
                 <a:ea typeface="Times New Roman" pitchFamily="34" charset="-122"/>
                 <a:cs typeface="Times New Roman" pitchFamily="34" charset="-120"/>
               </a:rPr>
-              <a:t>Observe your school surroundings and write two examples of damage to the environment.</a:t>
+              <a:t>Give two forms of damage to the environment of a school.</a:t>
             </a:r>
             <a:endParaRPr lang="en-US" sz="4000" dirty="0"/>
           </a:p>
@@ -18140,7 +18140,7 @@
                 <a:ea typeface="Times New Roman" pitchFamily="34" charset="-122"/>
                 <a:cs typeface="Times New Roman" pitchFamily="34" charset="-120"/>
               </a:rPr>
-              <a:t>Examples: trees cut for firewood, bare soil with small gullies, plastic bags and rubbish thrown around, burnt grass.</a:t>
+              <a:t>Waste on the ground and cut trees (also soil erosion).</a:t>
             </a:r>
             <a:endParaRPr lang="en-US" sz="4000" dirty="0"/>
           </a:p>
@@ -18359,7 +18359,7 @@
                 <a:ea typeface="Times New Roman" pitchFamily="34" charset="-122"/>
                 <a:cs typeface="Times New Roman" pitchFamily="34" charset="-120"/>
               </a:rPr>
-              <a:t>Write a short report (five lines) on the damage you observed around the school and your solutions.</a:t>
+              <a:t>Name the two types of solid waste.</a:t>
             </a:r>
             <a:endParaRPr lang="en-US" sz="4000" dirty="0"/>
           </a:p>
@@ -21023,7 +21023,7 @@
                           <a:ea typeface="Calibri" pitchFamily="34" charset="-122"/>
                           <a:cs typeface="Calibri" pitchFamily="34" charset="-120"/>
                         </a:rPr>
-                        <a:t>Write a short report (five lines) on the damage you observed around the school and your solutions.</a:t>
+                        <a:t>Name the two types of solid waste.</a:t>
                       </a:r>
                       <a:endParaRPr lang="en-US" sz="1600" dirty="0">
                         <a:latin typeface="Calibri" charset="0"/>
